--- a/course_materials/weeks/week_05/week_05_transactions_mvcc_locks.pptx
+++ b/course_materials/weeks/week_05/week_05_transactions_mvcc_locks.pptx
@@ -2,35 +2,35 @@
 <file path=ppt/presentation.xml><?xml version="1.0" encoding="utf-8"?>
 <p:presentation xmlns:p="http://schemas.openxmlformats.org/presentationml/2006/main">
   <p:sldMasterIdLst>
-    <p:sldMasterId xmlns:r="http://schemas.openxmlformats.org/officeDocument/2006/relationships" id="2147483648" r:id="R62f7482156794c2d"/>
+    <p:sldMasterId xmlns:r="http://schemas.openxmlformats.org/officeDocument/2006/relationships" id="2147483648" r:id="R94e74b49adb6400c"/>
   </p:sldMasterIdLst>
   <p:notesMasterIdLst>
-    <p:notesMasterId xmlns:r="http://schemas.openxmlformats.org/officeDocument/2006/relationships" r:id="R6ddc80d2f25d439d"/>
+    <p:notesMasterId xmlns:r="http://schemas.openxmlformats.org/officeDocument/2006/relationships" r:id="R6abd42e934524dd0"/>
   </p:notesMasterIdLst>
   <p:sldIdLst>
-    <p:sldId xmlns:r="http://schemas.openxmlformats.org/officeDocument/2006/relationships" id="256" r:id="Re701be9ff0544aa1"/>
-    <p:sldId xmlns:r="http://schemas.openxmlformats.org/officeDocument/2006/relationships" id="257" r:id="Rc7aa7fbd66d54787"/>
-    <p:sldId xmlns:r="http://schemas.openxmlformats.org/officeDocument/2006/relationships" id="258" r:id="Rc922939575474d7a"/>
-    <p:sldId xmlns:r="http://schemas.openxmlformats.org/officeDocument/2006/relationships" id="259" r:id="R46746835dda341d8"/>
-    <p:sldId xmlns:r="http://schemas.openxmlformats.org/officeDocument/2006/relationships" id="260" r:id="R00bdef3a60b14395"/>
-    <p:sldId xmlns:r="http://schemas.openxmlformats.org/officeDocument/2006/relationships" id="261" r:id="R1bd9503418c84b9b"/>
-    <p:sldId xmlns:r="http://schemas.openxmlformats.org/officeDocument/2006/relationships" id="262" r:id="R6e2049b92d594380"/>
-    <p:sldId xmlns:r="http://schemas.openxmlformats.org/officeDocument/2006/relationships" id="263" r:id="R28d1a7e882eb4c41"/>
-    <p:sldId xmlns:r="http://schemas.openxmlformats.org/officeDocument/2006/relationships" id="264" r:id="Rf851593205b74c6c"/>
-    <p:sldId xmlns:r="http://schemas.openxmlformats.org/officeDocument/2006/relationships" id="265" r:id="Re24ec265d4794437"/>
-    <p:sldId xmlns:r="http://schemas.openxmlformats.org/officeDocument/2006/relationships" id="266" r:id="R8a53bde398ff4ee0"/>
-    <p:sldId xmlns:r="http://schemas.openxmlformats.org/officeDocument/2006/relationships" id="267" r:id="Reeb83dfeee71446a"/>
-    <p:sldId xmlns:r="http://schemas.openxmlformats.org/officeDocument/2006/relationships" id="268" r:id="R99e50e545e3d4078"/>
-    <p:sldId xmlns:r="http://schemas.openxmlformats.org/officeDocument/2006/relationships" id="269" r:id="Rba1f0c12c3674528"/>
-    <p:sldId xmlns:r="http://schemas.openxmlformats.org/officeDocument/2006/relationships" id="270" r:id="R94049ac2e2b44a2a"/>
-    <p:sldId xmlns:r="http://schemas.openxmlformats.org/officeDocument/2006/relationships" id="271" r:id="R43dff36163904969"/>
-    <p:sldId xmlns:r="http://schemas.openxmlformats.org/officeDocument/2006/relationships" id="272" r:id="R9972a60be66e48d7"/>
-    <p:sldId xmlns:r="http://schemas.openxmlformats.org/officeDocument/2006/relationships" id="273" r:id="Rda2e20e028b44ee0"/>
-    <p:sldId xmlns:r="http://schemas.openxmlformats.org/officeDocument/2006/relationships" id="274" r:id="R399eb668a1734d8e"/>
-    <p:sldId xmlns:r="http://schemas.openxmlformats.org/officeDocument/2006/relationships" id="275" r:id="Rabfd74ca11f241ff"/>
-    <p:sldId xmlns:r="http://schemas.openxmlformats.org/officeDocument/2006/relationships" id="276" r:id="Rbd672e1469ac4504"/>
-    <p:sldId xmlns:r="http://schemas.openxmlformats.org/officeDocument/2006/relationships" id="277" r:id="R57154bc8d782459e"/>
-    <p:sldId xmlns:r="http://schemas.openxmlformats.org/officeDocument/2006/relationships" id="278" r:id="R0a47d0c529684054"/>
+    <p:sldId xmlns:r="http://schemas.openxmlformats.org/officeDocument/2006/relationships" id="256" r:id="R1ff7ea3ebf3d4246"/>
+    <p:sldId xmlns:r="http://schemas.openxmlformats.org/officeDocument/2006/relationships" id="257" r:id="R3ed5b3aa4d3c464d"/>
+    <p:sldId xmlns:r="http://schemas.openxmlformats.org/officeDocument/2006/relationships" id="258" r:id="Ra5ebf5e02f234097"/>
+    <p:sldId xmlns:r="http://schemas.openxmlformats.org/officeDocument/2006/relationships" id="259" r:id="Rb83c376d995c406c"/>
+    <p:sldId xmlns:r="http://schemas.openxmlformats.org/officeDocument/2006/relationships" id="260" r:id="Rb015ca425fff4677"/>
+    <p:sldId xmlns:r="http://schemas.openxmlformats.org/officeDocument/2006/relationships" id="261" r:id="R31f0bf4c3f254cd0"/>
+    <p:sldId xmlns:r="http://schemas.openxmlformats.org/officeDocument/2006/relationships" id="262" r:id="R5a93b76553bc4625"/>
+    <p:sldId xmlns:r="http://schemas.openxmlformats.org/officeDocument/2006/relationships" id="263" r:id="R2c8af698741c445b"/>
+    <p:sldId xmlns:r="http://schemas.openxmlformats.org/officeDocument/2006/relationships" id="264" r:id="R747a8310d4514767"/>
+    <p:sldId xmlns:r="http://schemas.openxmlformats.org/officeDocument/2006/relationships" id="265" r:id="Reaa608241ad24ce2"/>
+    <p:sldId xmlns:r="http://schemas.openxmlformats.org/officeDocument/2006/relationships" id="266" r:id="R817309a7c4ed40e7"/>
+    <p:sldId xmlns:r="http://schemas.openxmlformats.org/officeDocument/2006/relationships" id="267" r:id="Rbb808739f21d45be"/>
+    <p:sldId xmlns:r="http://schemas.openxmlformats.org/officeDocument/2006/relationships" id="268" r:id="R8357a355d7344b5b"/>
+    <p:sldId xmlns:r="http://schemas.openxmlformats.org/officeDocument/2006/relationships" id="269" r:id="R80173a5033584042"/>
+    <p:sldId xmlns:r="http://schemas.openxmlformats.org/officeDocument/2006/relationships" id="270" r:id="Rb8c7cfb365174f12"/>
+    <p:sldId xmlns:r="http://schemas.openxmlformats.org/officeDocument/2006/relationships" id="271" r:id="R13f0a3a7855f4382"/>
+    <p:sldId xmlns:r="http://schemas.openxmlformats.org/officeDocument/2006/relationships" id="272" r:id="R175530253b964be8"/>
+    <p:sldId xmlns:r="http://schemas.openxmlformats.org/officeDocument/2006/relationships" id="273" r:id="R343bd95ea1254cc0"/>
+    <p:sldId xmlns:r="http://schemas.openxmlformats.org/officeDocument/2006/relationships" id="274" r:id="Ree52ccd3b8384160"/>
+    <p:sldId xmlns:r="http://schemas.openxmlformats.org/officeDocument/2006/relationships" id="275" r:id="Rca7265d1b8bf4f12"/>
+    <p:sldId xmlns:r="http://schemas.openxmlformats.org/officeDocument/2006/relationships" id="276" r:id="R6d73f0e599e946ff"/>
+    <p:sldId xmlns:r="http://schemas.openxmlformats.org/officeDocument/2006/relationships" id="277" r:id="R2233b3af0b664c5c"/>
+    <p:sldId xmlns:r="http://schemas.openxmlformats.org/officeDocument/2006/relationships" id="278" r:id="Rceb81f7a34904ca9"/>
   </p:sldIdLst>
   <p:sldSz cx="12192000" cy="6858000"/>
   <p:notesSz cx="6858000" cy="9144000"/>
@@ -2014,7 +2014,7 @@
           </a:p>
           <a:p xmlns:a="http://schemas.openxmlformats.org/drawingml/2006/main">
             <a:r>
-              <a:t>Download Notebook 02, open Colab, and use File, then Upload notebook. In Supabase, use the Connect dialog's Session pooler connection for this exercise. Follow the notebook's SSL instructions and enter the connection URL only when the hidden prompt appears. Do not paste a password-bearing URL into a code cell or a Markdown explanation.</a:t>
+              <a:t>Open the Lab 2 page and click Open in Colab. Save a copy in Drive so you can keep your changes and results. The weekly page has the same button beside Notebook 02; downloading the file is only necessary if you prefer local Jupyter. In Supabase, use the Connect dialog's Session pooler connection for this exercise. Follow the notebook's SSL instructions and enter the connection URL only when the hidden prompt appears. Do not paste a password-bearing URL into a code cell or a Markdown explanation.</a:t>
             </a:r>
           </a:p>
           <a:p xmlns:a="http://schemas.openxmlformats.org/drawingml/2006/main">
@@ -2065,6 +2065,11 @@
           <a:p xmlns:a="http://schemas.openxmlformats.org/drawingml/2006/main">
             <a:r>
               <a:t>- https://supabase.com/docs/guides/database/connecting-to-postgres</a:t>
+            </a:r>
+          </a:p>
+          <a:p xmlns:a="http://schemas.openxmlformats.org/drawingml/2006/main">
+            <a:r>
+              <a:t>- https://research.google.com/colaboratory/faq.html</a:t>
             </a:r>
           </a:p>
         </p:txBody>
@@ -3309,7 +3314,7 @@
           </a:p>
           <a:p xmlns:a="http://schemas.openxmlformats.org/drawingml/2006/main">
             <a:r>
-              <a:t>The last experiment starts a new transaction, changes priority, and deliberately attempts to insert the already approved event key. Run rollback separately after the expected error. Your checks should distinguish the discarded new priority from the earlier committed assignment and event, which remain.</a:t>
+              <a:t>The next experiment starts a new transaction, changes priority, and deliberately attempts to insert the already approved event key. Run rollback separately after the expected error. Your checks should distinguish the discarded new priority from the earlier committed assignment and event, which remain.</a:t>
             </a:r>
           </a:p>
           <a:p xmlns:a="http://schemas.openxmlformats.org/drawingml/2006/main">
@@ -3319,6 +3324,16 @@
           </a:p>
           <a:p xmlns:a="http://schemas.openxmlformats.org/drawingml/2006/main">
             <a:r>
+              <a:t>Then compare that failure with the outdated assignment request. Imagine another screen still labels this ticket new and submits an assignment to Noah, user 202. The supplied UPDATE includes the condition that status must be new. Because your earlier assignment already moved the ticket to in_progress, this UPDATE returns no rows. There is no SQL exception. The following SELECT still shows Priya, user 201. We have not inserted a history event for this attempt because there was no assignment to record.</a:t>
+            </a:r>
+          </a:p>
+          <a:p xmlns:a="http://schemas.openxmlformats.org/drawingml/2006/main">
+            <a:r>
+              <a:t/>
+            </a:r>
+          </a:p>
+          <a:p xmlns:a="http://schemas.openxmlformats.org/drawingml/2006/main">
+            <a:r>
               <a:t>Use short comments in the same SQL file to explain what happened. The explanation should answer why putting the update and insert in separate committed transactions could leave the application's current state and history inconsistent. It should not just say that transactions are safer.</a:t>
             </a:r>
           </a:p>
@@ -3329,6 +3344,16 @@
           </a:p>
           <a:p xmlns:a="http://schemas.openxmlformats.org/drawingml/2006/main">
             <a:r>
+              <a:t>Add one sentence for the application developer: check the returned ticket before writing history or announcing success. If no row was returned, inspect the current record rather than telling the caller that Noah now has the ticket. An outdated status and a missing ticket can both produce an empty result, so the count tells us that our requested change did not happen, but does not by itself diagnose every cause.</a:t>
+            </a:r>
+          </a:p>
+          <a:p xmlns:a="http://schemas.openxmlformats.org/drawingml/2006/main">
+            <a:r>
+              <a:t/>
+            </a:r>
+          </a:p>
+          <a:p xmlns:a="http://schemas.openxmlformats.org/drawingml/2006/main">
+            <a:r>
               <a:t>Keep the expected-error batch clearly labeled so someone rerunning your file knows where execution pauses. If you restart the full exercise, use its disposable setup rather than resetting the source schema. There is one submission: your SQL file with the queries, observed results, and explanation. No second database session is required for this first lab.</a:t>
             </a:r>
           </a:p>
@@ -3350,6 +3375,11 @@
           <a:p xmlns:a="http://schemas.openxmlformats.org/drawingml/2006/main">
             <a:r>
               <a:t>- https://www.postgresql.org/docs/15/sql-createtableas.html</a:t>
+            </a:r>
+          </a:p>
+          <a:p xmlns:a="http://schemas.openxmlformats.org/drawingml/2006/main">
+            <a:r>
+              <a:t>- https://www.postgresql.org/docs/15/sql-update.html</a:t>
             </a:r>
           </a:p>
         </p:txBody>
@@ -3417,7 +3447,7 @@
   </p:cSld>
   <p:clrMap bg1="lt1" tx1="dk1" bg2="lt2" tx2="dk2" accent1="accent1" accent2="accent2" accent3="accent3" accent4="accent4" accent5="accent5" accent6="accent6" hlink="hlink" folHlink="folHlink"/>
   <p:sldLayoutIdLst>
-    <p:sldLayoutId xmlns:r="http://schemas.openxmlformats.org/officeDocument/2006/relationships" id="2147483649" r:id="Rfaaaad39227d45be"/>
+    <p:sldLayoutId xmlns:r="http://schemas.openxmlformats.org/officeDocument/2006/relationships" id="2147483649" r:id="R444d135e12854908"/>
   </p:sldLayoutIdLst>
   <p:txStyles>
     <p:titleStyle>
@@ -3968,7 +3998,7 @@
           <p:cNvPr id="7" name="eyebrow">
             <a:extLst xmlns:a="http://schemas.openxmlformats.org/drawingml/2006/main">
               <a:ext uri="{FF2B5EF4-FFF2-40B4-BE49-F238E27FC236}">
-                <a16:creationId xmlns:a16="http://schemas.microsoft.com/office/drawing/2014/main" id="{A33ECDA7-E65E-44CA-B357-919C061AF183}"/>
+                <a16:creationId xmlns:a16="http://schemas.microsoft.com/office/drawing/2014/main" id="{5282D8E0-BB31-43C6-A66B-FC059D999DDA}"/>
               </a:ext>
             </a:extLst>
           </p:cNvPr>
@@ -4025,7 +4055,7 @@
           <p:cNvPr id="2" name="slide-title">
             <a:extLst xmlns:a="http://schemas.openxmlformats.org/drawingml/2006/main">
               <a:ext uri="{FF2B5EF4-FFF2-40B4-BE49-F238E27FC236}">
-                <a16:creationId xmlns:a16="http://schemas.microsoft.com/office/drawing/2014/main" id="{756F9703-8C63-4401-B088-675348EDFB49}"/>
+                <a16:creationId xmlns:a16="http://schemas.microsoft.com/office/drawing/2014/main" id="{8CA4A6A4-226C-46C5-96B7-E7C4CDCBC6D5}"/>
               </a:ext>
             </a:extLst>
           </p:cNvPr>
@@ -4082,7 +4112,7 @@
           <p:cNvPr id="3" name="">
             <a:extLst xmlns:a="http://schemas.openxmlformats.org/drawingml/2006/main">
               <a:ext uri="{FF2B5EF4-FFF2-40B4-BE49-F238E27FC236}">
-                <a16:creationId xmlns:a16="http://schemas.microsoft.com/office/drawing/2014/main" id="{9A561FB5-09A7-4E4F-80C4-824485B81788}"/>
+                <a16:creationId xmlns:a16="http://schemas.microsoft.com/office/drawing/2014/main" id="{A96C4786-75CF-48E2-8AEC-B843CA7EED86}"/>
               </a:ext>
             </a:extLst>
           </p:cNvPr>
@@ -4114,7 +4144,7 @@
           <p:cNvPr id="4" name="slide-number">
             <a:extLst xmlns:a="http://schemas.openxmlformats.org/drawingml/2006/main">
               <a:ext uri="{FF2B5EF4-FFF2-40B4-BE49-F238E27FC236}">
-                <a16:creationId xmlns:a16="http://schemas.microsoft.com/office/drawing/2014/main" id="{59D5014E-72A6-4C63-900F-CEFBF272F019}"/>
+                <a16:creationId xmlns:a16="http://schemas.microsoft.com/office/drawing/2014/main" id="{803D1117-4D9D-4B26-8490-135359584FB4}"/>
               </a:ext>
             </a:extLst>
           </p:cNvPr>
@@ -4171,7 +4201,7 @@
           <p:cNvPr id="5" name="cover-case">
             <a:extLst xmlns:a="http://schemas.openxmlformats.org/drawingml/2006/main">
               <a:ext uri="{FF2B5EF4-FFF2-40B4-BE49-F238E27FC236}">
-                <a16:creationId xmlns:a16="http://schemas.microsoft.com/office/drawing/2014/main" id="{485E6028-7ECC-47A2-AE6A-C9C9F4AE3D4E}"/>
+                <a16:creationId xmlns:a16="http://schemas.microsoft.com/office/drawing/2014/main" id="{F246AFB4-4AE1-4A2A-B3B0-2785287C8908}"/>
               </a:ext>
             </a:extLst>
           </p:cNvPr>
@@ -4251,7 +4281,7 @@
           <p:cNvPr id="6" name="cover-arc">
             <a:extLst xmlns:a="http://schemas.openxmlformats.org/drawingml/2006/main">
               <a:ext uri="{FF2B5EF4-FFF2-40B4-BE49-F238E27FC236}">
-                <a16:creationId xmlns:a16="http://schemas.microsoft.com/office/drawing/2014/main" id="{1132541B-FAA4-4D01-A2F7-1528646D65B3}"/>
+                <a16:creationId xmlns:a16="http://schemas.microsoft.com/office/drawing/2014/main" id="{4D69AC97-E91B-4624-8889-8E8730B0AC6B}"/>
               </a:ext>
             </a:extLst>
           </p:cNvPr>
@@ -4360,7 +4390,7 @@
           <p:cNvPr id="7" name="eyebrow">
             <a:extLst xmlns:a="http://schemas.openxmlformats.org/drawingml/2006/main">
               <a:ext uri="{FF2B5EF4-FFF2-40B4-BE49-F238E27FC236}">
-                <a16:creationId xmlns:a16="http://schemas.microsoft.com/office/drawing/2014/main" id="{D1124676-5BAD-41D2-99A9-0CF9668D6802}"/>
+                <a16:creationId xmlns:a16="http://schemas.microsoft.com/office/drawing/2014/main" id="{00A7FA01-ECB9-49C4-9A85-441A73E37296}"/>
               </a:ext>
             </a:extLst>
           </p:cNvPr>
@@ -4417,7 +4447,7 @@
           <p:cNvPr id="2" name="slide-title">
             <a:extLst xmlns:a="http://schemas.openxmlformats.org/drawingml/2006/main">
               <a:ext uri="{FF2B5EF4-FFF2-40B4-BE49-F238E27FC236}">
-                <a16:creationId xmlns:a16="http://schemas.microsoft.com/office/drawing/2014/main" id="{75DFC413-80B9-4406-8C4C-BB6B25022DA7}"/>
+                <a16:creationId xmlns:a16="http://schemas.microsoft.com/office/drawing/2014/main" id="{6D24E76D-3265-46B9-B5BC-0BDB6A27C620}"/>
               </a:ext>
             </a:extLst>
           </p:cNvPr>
@@ -4474,7 +4504,7 @@
           <p:cNvPr id="3" name="">
             <a:extLst xmlns:a="http://schemas.openxmlformats.org/drawingml/2006/main">
               <a:ext uri="{FF2B5EF4-FFF2-40B4-BE49-F238E27FC236}">
-                <a16:creationId xmlns:a16="http://schemas.microsoft.com/office/drawing/2014/main" id="{63E24A5F-3881-42A4-B25D-5BF0986FC54D}"/>
+                <a16:creationId xmlns:a16="http://schemas.microsoft.com/office/drawing/2014/main" id="{C7F3219D-75F5-46E2-9FEE-B810B6F67C87}"/>
               </a:ext>
             </a:extLst>
           </p:cNvPr>
@@ -4506,7 +4536,7 @@
           <p:cNvPr id="4" name="slide-number">
             <a:extLst xmlns:a="http://schemas.openxmlformats.org/drawingml/2006/main">
               <a:ext uri="{FF2B5EF4-FFF2-40B4-BE49-F238E27FC236}">
-                <a16:creationId xmlns:a16="http://schemas.microsoft.com/office/drawing/2014/main" id="{433168D4-A3FF-4D2D-BB27-F9C158873334}"/>
+                <a16:creationId xmlns:a16="http://schemas.microsoft.com/office/drawing/2014/main" id="{E01D92B5-14AB-4211-AF26-7444B057588D}"/>
               </a:ext>
             </a:extLst>
           </p:cNvPr>
@@ -4563,7 +4593,7 @@
           <p:cNvPr id="5" name="day2">
             <a:extLst xmlns:a="http://schemas.openxmlformats.org/drawingml/2006/main">
               <a:ext uri="{FF2B5EF4-FFF2-40B4-BE49-F238E27FC236}">
-                <a16:creationId xmlns:a16="http://schemas.microsoft.com/office/drawing/2014/main" id="{88295C70-6DAA-40DF-82B6-D00E7E7C0F4E}"/>
+                <a16:creationId xmlns:a16="http://schemas.microsoft.com/office/drawing/2014/main" id="{6338F753-83FB-40B5-95C2-F84473F86947}"/>
               </a:ext>
             </a:extLst>
           </p:cNvPr>
@@ -4643,7 +4673,7 @@
           <p:cNvPr id="6" name="day2-goal">
             <a:extLst xmlns:a="http://schemas.openxmlformats.org/drawingml/2006/main">
               <a:ext uri="{FF2B5EF4-FFF2-40B4-BE49-F238E27FC236}">
-                <a16:creationId xmlns:a16="http://schemas.microsoft.com/office/drawing/2014/main" id="{43058BD4-978C-4CD6-BC7B-E03A1EA133DA}"/>
+                <a16:creationId xmlns:a16="http://schemas.microsoft.com/office/drawing/2014/main" id="{6DBDCCAF-0F6E-46EE-A176-D8946C99A781}"/>
               </a:ext>
             </a:extLst>
           </p:cNvPr>
@@ -4729,7 +4759,7 @@
           <p:cNvPr id="13" name="eyebrow">
             <a:extLst xmlns:a="http://schemas.openxmlformats.org/drawingml/2006/main">
               <a:ext uri="{FF2B5EF4-FFF2-40B4-BE49-F238E27FC236}">
-                <a16:creationId xmlns:a16="http://schemas.microsoft.com/office/drawing/2014/main" id="{9FE661D2-E4B6-41F7-9F14-59260AE29959}"/>
+                <a16:creationId xmlns:a16="http://schemas.microsoft.com/office/drawing/2014/main" id="{246F00BB-85CC-4690-A155-C246331BC41B}"/>
               </a:ext>
             </a:extLst>
           </p:cNvPr>
@@ -4786,7 +4816,7 @@
           <p:cNvPr id="2" name="slide-title">
             <a:extLst xmlns:a="http://schemas.openxmlformats.org/drawingml/2006/main">
               <a:ext uri="{FF2B5EF4-FFF2-40B4-BE49-F238E27FC236}">
-                <a16:creationId xmlns:a16="http://schemas.microsoft.com/office/drawing/2014/main" id="{D8A531A8-3C17-4735-9DBD-C31F5A5E4317}"/>
+                <a16:creationId xmlns:a16="http://schemas.microsoft.com/office/drawing/2014/main" id="{473D672B-C815-4D1B-9BA1-0D25A793CB7E}"/>
               </a:ext>
             </a:extLst>
           </p:cNvPr>
@@ -4843,7 +4873,7 @@
           <p:cNvPr id="3" name="">
             <a:extLst xmlns:a="http://schemas.openxmlformats.org/drawingml/2006/main">
               <a:ext uri="{FF2B5EF4-FFF2-40B4-BE49-F238E27FC236}">
-                <a16:creationId xmlns:a16="http://schemas.microsoft.com/office/drawing/2014/main" id="{AE647807-F645-4A89-9645-110C93DBFC8F}"/>
+                <a16:creationId xmlns:a16="http://schemas.microsoft.com/office/drawing/2014/main" id="{359D79BB-E681-4E6E-90B3-783DBDFA0670}"/>
               </a:ext>
             </a:extLst>
           </p:cNvPr>
@@ -4875,7 +4905,7 @@
           <p:cNvPr id="4" name="slide-number">
             <a:extLst xmlns:a="http://schemas.openxmlformats.org/drawingml/2006/main">
               <a:ext uri="{FF2B5EF4-FFF2-40B4-BE49-F238E27FC236}">
-                <a16:creationId xmlns:a16="http://schemas.microsoft.com/office/drawing/2014/main" id="{2CC8184B-734B-42DE-91A7-D58A8426F6DB}"/>
+                <a16:creationId xmlns:a16="http://schemas.microsoft.com/office/drawing/2014/main" id="{DBF5B670-A5B6-4F99-AF0A-2F961EC63553}"/>
               </a:ext>
             </a:extLst>
           </p:cNvPr>
@@ -4932,7 +4962,7 @@
           <p:cNvPr id="5" name="">
             <a:extLst xmlns:a="http://schemas.openxmlformats.org/drawingml/2006/main">
               <a:ext uri="{FF2B5EF4-FFF2-40B4-BE49-F238E27FC236}">
-                <a16:creationId xmlns:a16="http://schemas.microsoft.com/office/drawing/2014/main" id="{C50FD4D5-9905-4BB7-B2D6-77B6EA54D690}"/>
+                <a16:creationId xmlns:a16="http://schemas.microsoft.com/office/drawing/2014/main" id="{F3B195BB-137D-441D-9D6A-AEACCC9312BB}"/>
               </a:ext>
             </a:extLst>
           </p:cNvPr>
@@ -4964,7 +4994,7 @@
           <p:cNvPr id="6" name="session-a">
             <a:extLst xmlns:a="http://schemas.openxmlformats.org/drawingml/2006/main">
               <a:ext uri="{FF2B5EF4-FFF2-40B4-BE49-F238E27FC236}">
-                <a16:creationId xmlns:a16="http://schemas.microsoft.com/office/drawing/2014/main" id="{B68C7AEA-79BC-43AC-A799-D4DEF2D0559A}"/>
+                <a16:creationId xmlns:a16="http://schemas.microsoft.com/office/drawing/2014/main" id="{56212C75-060C-438D-94AA-5EA5BE6AA48C}"/>
               </a:ext>
             </a:extLst>
           </p:cNvPr>
@@ -5067,7 +5097,7 @@
           <p:cNvPr id="7" name="">
             <a:extLst xmlns:a="http://schemas.openxmlformats.org/drawingml/2006/main">
               <a:ext uri="{FF2B5EF4-FFF2-40B4-BE49-F238E27FC236}">
-                <a16:creationId xmlns:a16="http://schemas.microsoft.com/office/drawing/2014/main" id="{B9C64985-3057-4F0E-AFB4-E6EE2FDDA687}"/>
+                <a16:creationId xmlns:a16="http://schemas.microsoft.com/office/drawing/2014/main" id="{A7E88D17-5B6B-4A37-B494-3437C3561803}"/>
               </a:ext>
             </a:extLst>
           </p:cNvPr>
@@ -5099,7 +5129,7 @@
           <p:cNvPr id="8" name="session-b">
             <a:extLst xmlns:a="http://schemas.openxmlformats.org/drawingml/2006/main">
               <a:ext uri="{FF2B5EF4-FFF2-40B4-BE49-F238E27FC236}">
-                <a16:creationId xmlns:a16="http://schemas.microsoft.com/office/drawing/2014/main" id="{0216B337-CF7D-4944-B0E2-1B239FF729EE}"/>
+                <a16:creationId xmlns:a16="http://schemas.microsoft.com/office/drawing/2014/main" id="{F9BC2E7F-EF81-4F99-856B-C68AD7F78478}"/>
               </a:ext>
             </a:extLst>
           </p:cNvPr>
@@ -5202,7 +5232,7 @@
           <p:cNvPr id="9" name="">
             <a:extLst xmlns:a="http://schemas.openxmlformats.org/drawingml/2006/main">
               <a:ext uri="{FF2B5EF4-FFF2-40B4-BE49-F238E27FC236}">
-                <a16:creationId xmlns:a16="http://schemas.microsoft.com/office/drawing/2014/main" id="{AF442941-0BA2-4320-822E-917BC83E2A53}"/>
+                <a16:creationId xmlns:a16="http://schemas.microsoft.com/office/drawing/2014/main" id="{EBF51CD7-E5E6-46A0-AB9F-E69CE36AF561}"/>
               </a:ext>
             </a:extLst>
           </p:cNvPr>
@@ -5234,7 +5264,7 @@
           <p:cNvPr id="10" name="diagnostic">
             <a:extLst xmlns:a="http://schemas.openxmlformats.org/drawingml/2006/main">
               <a:ext uri="{FF2B5EF4-FFF2-40B4-BE49-F238E27FC236}">
-                <a16:creationId xmlns:a16="http://schemas.microsoft.com/office/drawing/2014/main" id="{2DA5CBD3-9F4D-485F-913A-90EF9EC2E835}"/>
+                <a16:creationId xmlns:a16="http://schemas.microsoft.com/office/drawing/2014/main" id="{98C7985A-3376-412B-86D3-2A0E6D3F3ED0}"/>
               </a:ext>
             </a:extLst>
           </p:cNvPr>
@@ -5337,7 +5367,7 @@
           <p:cNvPr id="11" name="sessions-rule">
             <a:extLst xmlns:a="http://schemas.openxmlformats.org/drawingml/2006/main">
               <a:ext uri="{FF2B5EF4-FFF2-40B4-BE49-F238E27FC236}">
-                <a16:creationId xmlns:a16="http://schemas.microsoft.com/office/drawing/2014/main" id="{A69CFE37-08F5-4A17-8B1F-F9654970D427}"/>
+                <a16:creationId xmlns:a16="http://schemas.microsoft.com/office/drawing/2014/main" id="{E1BE2431-83CB-4149-BD2D-04D62E3DB157}"/>
               </a:ext>
             </a:extLst>
           </p:cNvPr>
@@ -5394,7 +5424,7 @@
           <p:cNvPr id="12" name="fixture">
             <a:extLst xmlns:a="http://schemas.openxmlformats.org/drawingml/2006/main">
               <a:ext uri="{FF2B5EF4-FFF2-40B4-BE49-F238E27FC236}">
-                <a16:creationId xmlns:a16="http://schemas.microsoft.com/office/drawing/2014/main" id="{9A0DBBA6-6206-45D9-A56B-80BE458D9743}"/>
+                <a16:creationId xmlns:a16="http://schemas.microsoft.com/office/drawing/2014/main" id="{020E450B-5B61-4E37-945D-56EC1BCB88ED}"/>
               </a:ext>
             </a:extLst>
           </p:cNvPr>
@@ -5480,7 +5510,7 @@
           <p:cNvPr id="16" name="eyebrow">
             <a:extLst xmlns:a="http://schemas.openxmlformats.org/drawingml/2006/main">
               <a:ext uri="{FF2B5EF4-FFF2-40B4-BE49-F238E27FC236}">
-                <a16:creationId xmlns:a16="http://schemas.microsoft.com/office/drawing/2014/main" id="{E2470FCA-76B3-4ACC-B603-58D36F1A325C}"/>
+                <a16:creationId xmlns:a16="http://schemas.microsoft.com/office/drawing/2014/main" id="{F3CCCB44-A304-48BB-8899-E2C9A09BEEF6}"/>
               </a:ext>
             </a:extLst>
           </p:cNvPr>
@@ -5537,7 +5567,7 @@
           <p:cNvPr id="2" name="slide-title">
             <a:extLst xmlns:a="http://schemas.openxmlformats.org/drawingml/2006/main">
               <a:ext uri="{FF2B5EF4-FFF2-40B4-BE49-F238E27FC236}">
-                <a16:creationId xmlns:a16="http://schemas.microsoft.com/office/drawing/2014/main" id="{9AF13EE1-50B3-443C-BCB3-04A4034D22CE}"/>
+                <a16:creationId xmlns:a16="http://schemas.microsoft.com/office/drawing/2014/main" id="{69ADF478-CF6C-4DC6-ABB1-5D0B1485E585}"/>
               </a:ext>
             </a:extLst>
           </p:cNvPr>
@@ -5594,7 +5624,7 @@
           <p:cNvPr id="3" name="">
             <a:extLst xmlns:a="http://schemas.openxmlformats.org/drawingml/2006/main">
               <a:ext uri="{FF2B5EF4-FFF2-40B4-BE49-F238E27FC236}">
-                <a16:creationId xmlns:a16="http://schemas.microsoft.com/office/drawing/2014/main" id="{805F3C13-3A60-4DA4-9947-BF621AC8177F}"/>
+                <a16:creationId xmlns:a16="http://schemas.microsoft.com/office/drawing/2014/main" id="{E594D198-CAF5-4FC1-B2AF-923DAAAF7597}"/>
               </a:ext>
             </a:extLst>
           </p:cNvPr>
@@ -5626,7 +5656,7 @@
           <p:cNvPr id="4" name="slide-number">
             <a:extLst xmlns:a="http://schemas.openxmlformats.org/drawingml/2006/main">
               <a:ext uri="{FF2B5EF4-FFF2-40B4-BE49-F238E27FC236}">
-                <a16:creationId xmlns:a16="http://schemas.microsoft.com/office/drawing/2014/main" id="{20244AD2-2F67-454D-B907-5CD58AE30613}"/>
+                <a16:creationId xmlns:a16="http://schemas.microsoft.com/office/drawing/2014/main" id="{7677FE1F-5E64-4051-A2F1-90161C8ACB5B}"/>
               </a:ext>
             </a:extLst>
           </p:cNvPr>
@@ -5683,7 +5713,7 @@
           <p:cNvPr id="5" name="">
             <a:extLst xmlns:a="http://schemas.openxmlformats.org/drawingml/2006/main">
               <a:ext uri="{FF2B5EF4-FFF2-40B4-BE49-F238E27FC236}">
-                <a16:creationId xmlns:a16="http://schemas.microsoft.com/office/drawing/2014/main" id="{1C25422D-7E22-46A9-B59B-92C9AEFF2A57}"/>
+                <a16:creationId xmlns:a16="http://schemas.microsoft.com/office/drawing/2014/main" id="{08907E85-0B80-44F7-ACD9-708F20EF69F6}"/>
               </a:ext>
             </a:extLst>
           </p:cNvPr>
@@ -5715,7 +5745,7 @@
           <p:cNvPr id="6" name="old-version">
             <a:extLst xmlns:a="http://schemas.openxmlformats.org/drawingml/2006/main">
               <a:ext uri="{FF2B5EF4-FFF2-40B4-BE49-F238E27FC236}">
-                <a16:creationId xmlns:a16="http://schemas.microsoft.com/office/drawing/2014/main" id="{BC0E8DBA-ED59-4A6D-B4B4-E0DACE68DBC0}"/>
+                <a16:creationId xmlns:a16="http://schemas.microsoft.com/office/drawing/2014/main" id="{DD28F30D-EF1D-42C7-B97E-86AD7AAE2B2F}"/>
               </a:ext>
             </a:extLst>
           </p:cNvPr>
@@ -5795,7 +5825,7 @@
           <p:cNvPr id="7" name="">
             <a:extLst xmlns:a="http://schemas.openxmlformats.org/drawingml/2006/main">
               <a:ext uri="{FF2B5EF4-FFF2-40B4-BE49-F238E27FC236}">
-                <a16:creationId xmlns:a16="http://schemas.microsoft.com/office/drawing/2014/main" id="{151BD7F1-6AFB-49D2-AC3D-46561C2333BA}"/>
+                <a16:creationId xmlns:a16="http://schemas.microsoft.com/office/drawing/2014/main" id="{D6986DB6-39AC-4E56-B587-FB307FDF91AD}"/>
               </a:ext>
             </a:extLst>
           </p:cNvPr>
@@ -5827,7 +5857,7 @@
           <p:cNvPr id="8" name="new-version">
             <a:extLst xmlns:a="http://schemas.openxmlformats.org/drawingml/2006/main">
               <a:ext uri="{FF2B5EF4-FFF2-40B4-BE49-F238E27FC236}">
-                <a16:creationId xmlns:a16="http://schemas.microsoft.com/office/drawing/2014/main" id="{966988C2-2C40-45AA-BAD6-5B193F05DF47}"/>
+                <a16:creationId xmlns:a16="http://schemas.microsoft.com/office/drawing/2014/main" id="{1B535AE9-1014-499D-84A0-61FF0DAB7489}"/>
               </a:ext>
             </a:extLst>
           </p:cNvPr>
@@ -5907,7 +5937,7 @@
           <p:cNvPr id="9" name="">
             <a:extLst xmlns:a="http://schemas.openxmlformats.org/drawingml/2006/main">
               <a:ext uri="{FF2B5EF4-FFF2-40B4-BE49-F238E27FC236}">
-                <a16:creationId xmlns:a16="http://schemas.microsoft.com/office/drawing/2014/main" id="{0D79222F-C8BC-4FCD-9B8E-729450FE6A51}"/>
+                <a16:creationId xmlns:a16="http://schemas.microsoft.com/office/drawing/2014/main" id="{A12AD0BC-1FFE-4737-BA29-1F651E403AEF}"/>
               </a:ext>
             </a:extLst>
           </p:cNvPr>
@@ -5939,7 +5969,7 @@
           <p:cNvPr id="10" name="">
             <a:extLst xmlns:a="http://schemas.openxmlformats.org/drawingml/2006/main">
               <a:ext uri="{FF2B5EF4-FFF2-40B4-BE49-F238E27FC236}">
-                <a16:creationId xmlns:a16="http://schemas.microsoft.com/office/drawing/2014/main" id="{5C024BE8-9D54-49B4-9E17-077C27773E3E}"/>
+                <a16:creationId xmlns:a16="http://schemas.microsoft.com/office/drawing/2014/main" id="{B7310EE0-0554-4EF8-BE5C-AF12301D441A}"/>
               </a:ext>
             </a:extLst>
           </p:cNvPr>
@@ -5971,7 +6001,7 @@
           <p:cNvPr id="11" name="">
             <a:extLst xmlns:a="http://schemas.openxmlformats.org/drawingml/2006/main">
               <a:ext uri="{FF2B5EF4-FFF2-40B4-BE49-F238E27FC236}">
-                <a16:creationId xmlns:a16="http://schemas.microsoft.com/office/drawing/2014/main" id="{DEBD60D4-D61B-4449-8DC4-734DEAC310F0}"/>
+                <a16:creationId xmlns:a16="http://schemas.microsoft.com/office/drawing/2014/main" id="{FCEEEC64-D624-43CE-B9F9-C1154798DD78}"/>
               </a:ext>
             </a:extLst>
           </p:cNvPr>
@@ -6003,7 +6033,7 @@
           <p:cNvPr id="12" name="reader">
             <a:extLst xmlns:a="http://schemas.openxmlformats.org/drawingml/2006/main">
               <a:ext uri="{FF2B5EF4-FFF2-40B4-BE49-F238E27FC236}">
-                <a16:creationId xmlns:a16="http://schemas.microsoft.com/office/drawing/2014/main" id="{E36EED91-8A17-452B-AD36-7B86923CA26E}"/>
+                <a16:creationId xmlns:a16="http://schemas.microsoft.com/office/drawing/2014/main" id="{FEAC3AFB-66BA-494B-B008-BB9AF7178F53}"/>
               </a:ext>
             </a:extLst>
           </p:cNvPr>
@@ -6083,7 +6113,7 @@
           <p:cNvPr id="13" name="">
             <a:extLst xmlns:a="http://schemas.openxmlformats.org/drawingml/2006/main">
               <a:ext uri="{FF2B5EF4-FFF2-40B4-BE49-F238E27FC236}">
-                <a16:creationId xmlns:a16="http://schemas.microsoft.com/office/drawing/2014/main" id="{B5F20B8D-C42C-4926-8B92-8ECFBA13850C}"/>
+                <a16:creationId xmlns:a16="http://schemas.microsoft.com/office/drawing/2014/main" id="{E07AC19B-449A-46B2-8203-D9650FCF8E1D}"/>
               </a:ext>
             </a:extLst>
           </p:cNvPr>
@@ -6115,7 +6145,7 @@
           <p:cNvPr id="14" name="own-writes">
             <a:extLst xmlns:a="http://schemas.openxmlformats.org/drawingml/2006/main">
               <a:ext uri="{FF2B5EF4-FFF2-40B4-BE49-F238E27FC236}">
-                <a16:creationId xmlns:a16="http://schemas.microsoft.com/office/drawing/2014/main" id="{F1B540BD-DC9A-4BF1-A29E-10DEF404FA16}"/>
+                <a16:creationId xmlns:a16="http://schemas.microsoft.com/office/drawing/2014/main" id="{1689AA91-5494-46FF-9AAE-B31B9C972CEF}"/>
               </a:ext>
             </a:extLst>
           </p:cNvPr>
@@ -6195,7 +6225,7 @@
           <p:cNvPr id="15" name="mvcc">
             <a:extLst xmlns:a="http://schemas.openxmlformats.org/drawingml/2006/main">
               <a:ext uri="{FF2B5EF4-FFF2-40B4-BE49-F238E27FC236}">
-                <a16:creationId xmlns:a16="http://schemas.microsoft.com/office/drawing/2014/main" id="{D5BC00B3-0AAD-4EC3-AF85-C65A2B0ECB43}"/>
+                <a16:creationId xmlns:a16="http://schemas.microsoft.com/office/drawing/2014/main" id="{C179B911-1AA3-4B03-89E8-60BDD0DD3F2F}"/>
               </a:ext>
             </a:extLst>
           </p:cNvPr>
@@ -6281,7 +6311,7 @@
           <p:cNvPr id="8" name="eyebrow">
             <a:extLst xmlns:a="http://schemas.openxmlformats.org/drawingml/2006/main">
               <a:ext uri="{FF2B5EF4-FFF2-40B4-BE49-F238E27FC236}">
-                <a16:creationId xmlns:a16="http://schemas.microsoft.com/office/drawing/2014/main" id="{D819AFBC-D2E8-45C3-B627-D0C9D3170797}"/>
+                <a16:creationId xmlns:a16="http://schemas.microsoft.com/office/drawing/2014/main" id="{BFE7D312-7445-4F86-AA8F-E16A199C32EE}"/>
               </a:ext>
             </a:extLst>
           </p:cNvPr>
@@ -6338,7 +6368,7 @@
           <p:cNvPr id="2" name="slide-title">
             <a:extLst xmlns:a="http://schemas.openxmlformats.org/drawingml/2006/main">
               <a:ext uri="{FF2B5EF4-FFF2-40B4-BE49-F238E27FC236}">
-                <a16:creationId xmlns:a16="http://schemas.microsoft.com/office/drawing/2014/main" id="{0BF41857-1817-4DE4-A925-6FA148A94BCA}"/>
+                <a16:creationId xmlns:a16="http://schemas.microsoft.com/office/drawing/2014/main" id="{45A251B9-3E16-48E2-9616-E4B0273A1EF9}"/>
               </a:ext>
             </a:extLst>
           </p:cNvPr>
@@ -6395,7 +6425,7 @@
           <p:cNvPr id="3" name="">
             <a:extLst xmlns:a="http://schemas.openxmlformats.org/drawingml/2006/main">
               <a:ext uri="{FF2B5EF4-FFF2-40B4-BE49-F238E27FC236}">
-                <a16:creationId xmlns:a16="http://schemas.microsoft.com/office/drawing/2014/main" id="{2494D575-9E22-42E5-90B6-5610CC232589}"/>
+                <a16:creationId xmlns:a16="http://schemas.microsoft.com/office/drawing/2014/main" id="{44B1B77D-C4FA-4358-8C5B-9C6109A3B734}"/>
               </a:ext>
             </a:extLst>
           </p:cNvPr>
@@ -6427,7 +6457,7 @@
           <p:cNvPr id="4" name="slide-number">
             <a:extLst xmlns:a="http://schemas.openxmlformats.org/drawingml/2006/main">
               <a:ext uri="{FF2B5EF4-FFF2-40B4-BE49-F238E27FC236}">
-                <a16:creationId xmlns:a16="http://schemas.microsoft.com/office/drawing/2014/main" id="{F6A7EB96-51BB-4691-93A2-24218D674DD2}"/>
+                <a16:creationId xmlns:a16="http://schemas.microsoft.com/office/drawing/2014/main" id="{AB61F3D1-FD38-4DA6-91F6-0A076FFD6BF2}"/>
               </a:ext>
             </a:extLst>
           </p:cNvPr>
@@ -6484,7 +6514,7 @@
           <p:cNvPr id="5" name="isolation-case">
             <a:extLst xmlns:a="http://schemas.openxmlformats.org/drawingml/2006/main">
               <a:ext uri="{FF2B5EF4-FFF2-40B4-BE49-F238E27FC236}">
-                <a16:creationId xmlns:a16="http://schemas.microsoft.com/office/drawing/2014/main" id="{4CA860ED-2A24-40DD-960A-B5B12FB81D78}"/>
+                <a16:creationId xmlns:a16="http://schemas.microsoft.com/office/drawing/2014/main" id="{14396E19-2B2C-494F-9024-7F0EFA39E796}"/>
               </a:ext>
             </a:extLst>
           </p:cNvPr>
@@ -6860,7 +6890,7 @@
           <p:cNvPr id="7" name="isolation-scope">
             <a:extLst xmlns:a="http://schemas.openxmlformats.org/drawingml/2006/main">
               <a:ext uri="{FF2B5EF4-FFF2-40B4-BE49-F238E27FC236}">
-                <a16:creationId xmlns:a16="http://schemas.microsoft.com/office/drawing/2014/main" id="{77F37CD4-BEDF-40EC-850C-CB3E985FE03C}"/>
+                <a16:creationId xmlns:a16="http://schemas.microsoft.com/office/drawing/2014/main" id="{C005ED86-6142-4FE9-BE71-2B25491446CE}"/>
               </a:ext>
             </a:extLst>
           </p:cNvPr>
@@ -6946,7 +6976,7 @@
           <p:cNvPr id="12" name="eyebrow">
             <a:extLst xmlns:a="http://schemas.openxmlformats.org/drawingml/2006/main">
               <a:ext uri="{FF2B5EF4-FFF2-40B4-BE49-F238E27FC236}">
-                <a16:creationId xmlns:a16="http://schemas.microsoft.com/office/drawing/2014/main" id="{F00ADED4-9EF5-4913-94F1-6F8DDE81A833}"/>
+                <a16:creationId xmlns:a16="http://schemas.microsoft.com/office/drawing/2014/main" id="{8F03A9C0-1688-47D5-B6DE-285980026149}"/>
               </a:ext>
             </a:extLst>
           </p:cNvPr>
@@ -7003,7 +7033,7 @@
           <p:cNvPr id="2" name="slide-title">
             <a:extLst xmlns:a="http://schemas.openxmlformats.org/drawingml/2006/main">
               <a:ext uri="{FF2B5EF4-FFF2-40B4-BE49-F238E27FC236}">
-                <a16:creationId xmlns:a16="http://schemas.microsoft.com/office/drawing/2014/main" id="{A4CAB135-9BFF-4296-AF9F-A6D6A28C1A89}"/>
+                <a16:creationId xmlns:a16="http://schemas.microsoft.com/office/drawing/2014/main" id="{9B193C55-0254-4298-95A6-81EAEE0E45ED}"/>
               </a:ext>
             </a:extLst>
           </p:cNvPr>
@@ -7060,7 +7090,7 @@
           <p:cNvPr id="3" name="">
             <a:extLst xmlns:a="http://schemas.openxmlformats.org/drawingml/2006/main">
               <a:ext uri="{FF2B5EF4-FFF2-40B4-BE49-F238E27FC236}">
-                <a16:creationId xmlns:a16="http://schemas.microsoft.com/office/drawing/2014/main" id="{6450DBBD-F56A-4276-84E5-1F388ED92D14}"/>
+                <a16:creationId xmlns:a16="http://schemas.microsoft.com/office/drawing/2014/main" id="{9EDA3007-35FC-4D4F-BFAF-112660A976F3}"/>
               </a:ext>
             </a:extLst>
           </p:cNvPr>
@@ -7092,7 +7122,7 @@
           <p:cNvPr id="4" name="slide-number">
             <a:extLst xmlns:a="http://schemas.openxmlformats.org/drawingml/2006/main">
               <a:ext uri="{FF2B5EF4-FFF2-40B4-BE49-F238E27FC236}">
-                <a16:creationId xmlns:a16="http://schemas.microsoft.com/office/drawing/2014/main" id="{651B6099-901B-4472-94A0-30B20A93F94D}"/>
+                <a16:creationId xmlns:a16="http://schemas.microsoft.com/office/drawing/2014/main" id="{E22D5F07-D970-4213-88C7-F5C0E6EF7896}"/>
               </a:ext>
             </a:extLst>
           </p:cNvPr>
@@ -7149,7 +7179,7 @@
           <p:cNvPr id="5" name="">
             <a:extLst xmlns:a="http://schemas.openxmlformats.org/drawingml/2006/main">
               <a:ext uri="{FF2B5EF4-FFF2-40B4-BE49-F238E27FC236}">
-                <a16:creationId xmlns:a16="http://schemas.microsoft.com/office/drawing/2014/main" id="{6C74145A-9330-4A81-A89A-522026F9FC43}"/>
+                <a16:creationId xmlns:a16="http://schemas.microsoft.com/office/drawing/2014/main" id="{347AF73C-59F0-46BB-8AE5-AAA2EE74F9A0}"/>
               </a:ext>
             </a:extLst>
           </p:cNvPr>
@@ -7181,7 +7211,7 @@
           <p:cNvPr id="6" name="a-sql">
             <a:extLst xmlns:a="http://schemas.openxmlformats.org/drawingml/2006/main">
               <a:ext uri="{FF2B5EF4-FFF2-40B4-BE49-F238E27FC236}">
-                <a16:creationId xmlns:a16="http://schemas.microsoft.com/office/drawing/2014/main" id="{C1BD1727-7E15-4DBA-8FE8-590C58CCB2A1}"/>
+                <a16:creationId xmlns:a16="http://schemas.microsoft.com/office/drawing/2014/main" id="{95B88899-2269-4230-A2F1-7D8AB367F746}"/>
               </a:ext>
             </a:extLst>
           </p:cNvPr>
@@ -7307,7 +7337,7 @@
           <p:cNvPr id="7" name="">
             <a:extLst xmlns:a="http://schemas.openxmlformats.org/drawingml/2006/main">
               <a:ext uri="{FF2B5EF4-FFF2-40B4-BE49-F238E27FC236}">
-                <a16:creationId xmlns:a16="http://schemas.microsoft.com/office/drawing/2014/main" id="{7BB21F98-3F99-4761-968A-57A8C1A324FE}"/>
+                <a16:creationId xmlns:a16="http://schemas.microsoft.com/office/drawing/2014/main" id="{EEF4D42B-36FC-4A73-84AB-BB05001934EB}"/>
               </a:ext>
             </a:extLst>
           </p:cNvPr>
@@ -7339,7 +7369,7 @@
           <p:cNvPr id="8" name="b-sql">
             <a:extLst xmlns:a="http://schemas.openxmlformats.org/drawingml/2006/main">
               <a:ext uri="{FF2B5EF4-FFF2-40B4-BE49-F238E27FC236}">
-                <a16:creationId xmlns:a16="http://schemas.microsoft.com/office/drawing/2014/main" id="{F282246D-AC27-49F3-9038-AB8371F57F7A}"/>
+                <a16:creationId xmlns:a16="http://schemas.microsoft.com/office/drawing/2014/main" id="{8D8BAF3F-012E-496F-A8A8-F94493F08FE5}"/>
               </a:ext>
             </a:extLst>
           </p:cNvPr>
@@ -7511,7 +7541,7 @@
           <p:cNvPr id="9" name="a-label">
             <a:extLst xmlns:a="http://schemas.openxmlformats.org/drawingml/2006/main">
               <a:ext uri="{FF2B5EF4-FFF2-40B4-BE49-F238E27FC236}">
-                <a16:creationId xmlns:a16="http://schemas.microsoft.com/office/drawing/2014/main" id="{2D5EB0F1-14E3-486C-9901-C62C08304221}"/>
+                <a16:creationId xmlns:a16="http://schemas.microsoft.com/office/drawing/2014/main" id="{26141BCD-90CE-4575-98A7-767B8BC15E55}"/>
               </a:ext>
             </a:extLst>
           </p:cNvPr>
@@ -7568,7 +7598,7 @@
           <p:cNvPr id="10" name="b-label">
             <a:extLst xmlns:a="http://schemas.openxmlformats.org/drawingml/2006/main">
               <a:ext uri="{FF2B5EF4-FFF2-40B4-BE49-F238E27FC236}">
-                <a16:creationId xmlns:a16="http://schemas.microsoft.com/office/drawing/2014/main" id="{6B41E642-00C9-43A7-AE5E-FCBBD30E78BB}"/>
+                <a16:creationId xmlns:a16="http://schemas.microsoft.com/office/drawing/2014/main" id="{E12EB9B7-D4A1-44C8-90B1-866200DB0DE1}"/>
               </a:ext>
             </a:extLst>
           </p:cNvPr>
@@ -7625,7 +7655,7 @@
           <p:cNvPr id="11" name="bounded">
             <a:extLst xmlns:a="http://schemas.openxmlformats.org/drawingml/2006/main">
               <a:ext uri="{FF2B5EF4-FFF2-40B4-BE49-F238E27FC236}">
-                <a16:creationId xmlns:a16="http://schemas.microsoft.com/office/drawing/2014/main" id="{8F5B71CD-F4BE-47E6-8EB0-B3967689E26B}"/>
+                <a16:creationId xmlns:a16="http://schemas.microsoft.com/office/drawing/2014/main" id="{2AE0004E-30FC-4C9D-A30E-37017A65C744}"/>
               </a:ext>
             </a:extLst>
           </p:cNvPr>
@@ -7711,7 +7741,7 @@
           <p:cNvPr id="9" name="eyebrow">
             <a:extLst xmlns:a="http://schemas.openxmlformats.org/drawingml/2006/main">
               <a:ext uri="{FF2B5EF4-FFF2-40B4-BE49-F238E27FC236}">
-                <a16:creationId xmlns:a16="http://schemas.microsoft.com/office/drawing/2014/main" id="{E7709F48-0847-450F-9278-5B900F4CBC38}"/>
+                <a16:creationId xmlns:a16="http://schemas.microsoft.com/office/drawing/2014/main" id="{E5D6D4C2-9DAE-4BF4-8024-6C903490BDD0}"/>
               </a:ext>
             </a:extLst>
           </p:cNvPr>
@@ -7768,7 +7798,7 @@
           <p:cNvPr id="2" name="slide-title">
             <a:extLst xmlns:a="http://schemas.openxmlformats.org/drawingml/2006/main">
               <a:ext uri="{FF2B5EF4-FFF2-40B4-BE49-F238E27FC236}">
-                <a16:creationId xmlns:a16="http://schemas.microsoft.com/office/drawing/2014/main" id="{0DCEFE91-7F7A-4007-854B-0AB1A63F9914}"/>
+                <a16:creationId xmlns:a16="http://schemas.microsoft.com/office/drawing/2014/main" id="{15679570-A62D-4D77-B14E-8F0998D4E59C}"/>
               </a:ext>
             </a:extLst>
           </p:cNvPr>
@@ -7825,7 +7855,7 @@
           <p:cNvPr id="3" name="">
             <a:extLst xmlns:a="http://schemas.openxmlformats.org/drawingml/2006/main">
               <a:ext uri="{FF2B5EF4-FFF2-40B4-BE49-F238E27FC236}">
-                <a16:creationId xmlns:a16="http://schemas.microsoft.com/office/drawing/2014/main" id="{27AEF81E-5F00-4FDB-B10F-1A89A664E60C}"/>
+                <a16:creationId xmlns:a16="http://schemas.microsoft.com/office/drawing/2014/main" id="{81252111-FD48-489F-A66C-C4A9C7591D91}"/>
               </a:ext>
             </a:extLst>
           </p:cNvPr>
@@ -7857,7 +7887,7 @@
           <p:cNvPr id="4" name="slide-number">
             <a:extLst xmlns:a="http://schemas.openxmlformats.org/drawingml/2006/main">
               <a:ext uri="{FF2B5EF4-FFF2-40B4-BE49-F238E27FC236}">
-                <a16:creationId xmlns:a16="http://schemas.microsoft.com/office/drawing/2014/main" id="{DEE47171-4269-4C8F-83AA-62682738D5E5}"/>
+                <a16:creationId xmlns:a16="http://schemas.microsoft.com/office/drawing/2014/main" id="{68F22210-DA15-4FB0-A5C7-F54EF754DB01}"/>
               </a:ext>
             </a:extLst>
           </p:cNvPr>
@@ -7914,7 +7944,7 @@
           <p:cNvPr id="5" name="">
             <a:extLst xmlns:a="http://schemas.openxmlformats.org/drawingml/2006/main">
               <a:ext uri="{FF2B5EF4-FFF2-40B4-BE49-F238E27FC236}">
-                <a16:creationId xmlns:a16="http://schemas.microsoft.com/office/drawing/2014/main" id="{902F4061-3D7D-42A8-BD72-54849FDCFE3C}"/>
+                <a16:creationId xmlns:a16="http://schemas.microsoft.com/office/drawing/2014/main" id="{43C5241E-2578-48F3-8488-DB9489034B65}"/>
               </a:ext>
             </a:extLst>
           </p:cNvPr>
@@ -7946,7 +7976,7 @@
           <p:cNvPr id="6" name="diagnose-sql">
             <a:extLst xmlns:a="http://schemas.openxmlformats.org/drawingml/2006/main">
               <a:ext uri="{FF2B5EF4-FFF2-40B4-BE49-F238E27FC236}">
-                <a16:creationId xmlns:a16="http://schemas.microsoft.com/office/drawing/2014/main" id="{67681195-0CAA-4470-9A5E-64D403DCADDA}"/>
+                <a16:creationId xmlns:a16="http://schemas.microsoft.com/office/drawing/2014/main" id="{992AEC77-6455-4B96-880A-D45DB98BF372}"/>
               </a:ext>
             </a:extLst>
           </p:cNvPr>
@@ -8164,7 +8194,7 @@
           <p:cNvPr id="7" name="diagnose-meaning">
             <a:extLst xmlns:a="http://schemas.openxmlformats.org/drawingml/2006/main">
               <a:ext uri="{FF2B5EF4-FFF2-40B4-BE49-F238E27FC236}">
-                <a16:creationId xmlns:a16="http://schemas.microsoft.com/office/drawing/2014/main" id="{106F2DAC-1BEF-4C19-B8FB-0AB423E0F773}"/>
+                <a16:creationId xmlns:a16="http://schemas.microsoft.com/office/drawing/2014/main" id="{849D0ACB-0D89-482F-9A88-39CC8C109423}"/>
               </a:ext>
             </a:extLst>
           </p:cNvPr>
@@ -8221,7 +8251,7 @@
           <p:cNvPr id="8" name="diagnose-scope">
             <a:extLst xmlns:a="http://schemas.openxmlformats.org/drawingml/2006/main">
               <a:ext uri="{FF2B5EF4-FFF2-40B4-BE49-F238E27FC236}">
-                <a16:creationId xmlns:a16="http://schemas.microsoft.com/office/drawing/2014/main" id="{0074501D-825F-4B1E-BD50-2B9AABF741AB}"/>
+                <a16:creationId xmlns:a16="http://schemas.microsoft.com/office/drawing/2014/main" id="{2833A890-B37F-4804-A060-2214D31D1D99}"/>
               </a:ext>
             </a:extLst>
           </p:cNvPr>
@@ -8307,7 +8337,7 @@
           <p:cNvPr id="8" name="eyebrow">
             <a:extLst xmlns:a="http://schemas.openxmlformats.org/drawingml/2006/main">
               <a:ext uri="{FF2B5EF4-FFF2-40B4-BE49-F238E27FC236}">
-                <a16:creationId xmlns:a16="http://schemas.microsoft.com/office/drawing/2014/main" id="{149AEBF7-9E27-4E9D-8B00-4EE04E312C84}"/>
+                <a16:creationId xmlns:a16="http://schemas.microsoft.com/office/drawing/2014/main" id="{AAC1CBF8-E831-406D-BBB4-2F68EEE7B142}"/>
               </a:ext>
             </a:extLst>
           </p:cNvPr>
@@ -8364,7 +8394,7 @@
           <p:cNvPr id="2" name="slide-title">
             <a:extLst xmlns:a="http://schemas.openxmlformats.org/drawingml/2006/main">
               <a:ext uri="{FF2B5EF4-FFF2-40B4-BE49-F238E27FC236}">
-                <a16:creationId xmlns:a16="http://schemas.microsoft.com/office/drawing/2014/main" id="{360C0147-041C-46EB-AED5-55A7FD554316}"/>
+                <a16:creationId xmlns:a16="http://schemas.microsoft.com/office/drawing/2014/main" id="{9E4D5AA0-7446-48CD-AC10-F358B81B807F}"/>
               </a:ext>
             </a:extLst>
           </p:cNvPr>
@@ -8421,7 +8451,7 @@
           <p:cNvPr id="3" name="">
             <a:extLst xmlns:a="http://schemas.openxmlformats.org/drawingml/2006/main">
               <a:ext uri="{FF2B5EF4-FFF2-40B4-BE49-F238E27FC236}">
-                <a16:creationId xmlns:a16="http://schemas.microsoft.com/office/drawing/2014/main" id="{BC50D5EA-0936-41B3-8C11-D8FB4C8C30BB}"/>
+                <a16:creationId xmlns:a16="http://schemas.microsoft.com/office/drawing/2014/main" id="{620051F0-A9B2-4D54-B323-826ECED2428B}"/>
               </a:ext>
             </a:extLst>
           </p:cNvPr>
@@ -8453,7 +8483,7 @@
           <p:cNvPr id="4" name="slide-number">
             <a:extLst xmlns:a="http://schemas.openxmlformats.org/drawingml/2006/main">
               <a:ext uri="{FF2B5EF4-FFF2-40B4-BE49-F238E27FC236}">
-                <a16:creationId xmlns:a16="http://schemas.microsoft.com/office/drawing/2014/main" id="{3F131B37-AADD-4D54-9F01-52C474DA5C8B}"/>
+                <a16:creationId xmlns:a16="http://schemas.microsoft.com/office/drawing/2014/main" id="{EC1E46A6-3C75-4E3C-86C3-1FE2B716603D}"/>
               </a:ext>
             </a:extLst>
           </p:cNvPr>
@@ -8901,7 +8931,7 @@
           <p:cNvPr id="6" name="snapshot-meaning">
             <a:extLst xmlns:a="http://schemas.openxmlformats.org/drawingml/2006/main">
               <a:ext uri="{FF2B5EF4-FFF2-40B4-BE49-F238E27FC236}">
-                <a16:creationId xmlns:a16="http://schemas.microsoft.com/office/drawing/2014/main" id="{5DC0D360-A814-48B0-BE83-3BFC018BC846}"/>
+                <a16:creationId xmlns:a16="http://schemas.microsoft.com/office/drawing/2014/main" id="{A8C5D696-6EE9-4531-83D0-40894D5376A6}"/>
               </a:ext>
             </a:extLst>
           </p:cNvPr>
@@ -8958,7 +8988,7 @@
           <p:cNvPr id="7" name="snapshot-scope">
             <a:extLst xmlns:a="http://schemas.openxmlformats.org/drawingml/2006/main">
               <a:ext uri="{FF2B5EF4-FFF2-40B4-BE49-F238E27FC236}">
-                <a16:creationId xmlns:a16="http://schemas.microsoft.com/office/drawing/2014/main" id="{2E47DCB9-EDAC-4D07-AD94-7A5693723406}"/>
+                <a16:creationId xmlns:a16="http://schemas.microsoft.com/office/drawing/2014/main" id="{FA530846-BEA7-4337-9B78-692073AB235B}"/>
               </a:ext>
             </a:extLst>
           </p:cNvPr>
@@ -9044,7 +9074,7 @@
           <p:cNvPr id="9" name="eyebrow">
             <a:extLst xmlns:a="http://schemas.openxmlformats.org/drawingml/2006/main">
               <a:ext uri="{FF2B5EF4-FFF2-40B4-BE49-F238E27FC236}">
-                <a16:creationId xmlns:a16="http://schemas.microsoft.com/office/drawing/2014/main" id="{3652E96C-7F0C-4D50-970B-959A170C4E71}"/>
+                <a16:creationId xmlns:a16="http://schemas.microsoft.com/office/drawing/2014/main" id="{54D609E8-7F45-492B-B8AF-EDD2B743FBBC}"/>
               </a:ext>
             </a:extLst>
           </p:cNvPr>
@@ -9101,7 +9131,7 @@
           <p:cNvPr id="2" name="slide-title">
             <a:extLst xmlns:a="http://schemas.openxmlformats.org/drawingml/2006/main">
               <a:ext uri="{FF2B5EF4-FFF2-40B4-BE49-F238E27FC236}">
-                <a16:creationId xmlns:a16="http://schemas.microsoft.com/office/drawing/2014/main" id="{48B6CFA8-64AC-46A6-9E34-3EB6D3D68598}"/>
+                <a16:creationId xmlns:a16="http://schemas.microsoft.com/office/drawing/2014/main" id="{104FA06B-239F-4FB7-9FA5-806AB4373968}"/>
               </a:ext>
             </a:extLst>
           </p:cNvPr>
@@ -9158,7 +9188,7 @@
           <p:cNvPr id="3" name="">
             <a:extLst xmlns:a="http://schemas.openxmlformats.org/drawingml/2006/main">
               <a:ext uri="{FF2B5EF4-FFF2-40B4-BE49-F238E27FC236}">
-                <a16:creationId xmlns:a16="http://schemas.microsoft.com/office/drawing/2014/main" id="{40884DEE-3E0A-442B-8060-9F2276EFE8CF}"/>
+                <a16:creationId xmlns:a16="http://schemas.microsoft.com/office/drawing/2014/main" id="{447D83FD-92EC-4077-85DF-A8E02D557F7F}"/>
               </a:ext>
             </a:extLst>
           </p:cNvPr>
@@ -9190,7 +9220,7 @@
           <p:cNvPr id="4" name="slide-number">
             <a:extLst xmlns:a="http://schemas.openxmlformats.org/drawingml/2006/main">
               <a:ext uri="{FF2B5EF4-FFF2-40B4-BE49-F238E27FC236}">
-                <a16:creationId xmlns:a16="http://schemas.microsoft.com/office/drawing/2014/main" id="{23EDBB9A-03AC-4E96-BA71-C6C0F6C109CD}"/>
+                <a16:creationId xmlns:a16="http://schemas.microsoft.com/office/drawing/2014/main" id="{302069DC-E852-4038-9225-278E51FC4D77}"/>
               </a:ext>
             </a:extLst>
           </p:cNvPr>
@@ -9492,7 +9522,7 @@
           <p:cNvPr id="6" name="">
             <a:extLst xmlns:a="http://schemas.openxmlformats.org/drawingml/2006/main">
               <a:ext uri="{FF2B5EF4-FFF2-40B4-BE49-F238E27FC236}">
-                <a16:creationId xmlns:a16="http://schemas.microsoft.com/office/drawing/2014/main" id="{F256060D-61BB-4196-B8BA-874F05A9CA5F}"/>
+                <a16:creationId xmlns:a16="http://schemas.microsoft.com/office/drawing/2014/main" id="{7D63AC62-8E58-4A98-9665-0412CFBFF95E}"/>
               </a:ext>
             </a:extLst>
           </p:cNvPr>
@@ -9524,7 +9554,7 @@
           <p:cNvPr id="7" name="lock-final">
             <a:extLst xmlns:a="http://schemas.openxmlformats.org/drawingml/2006/main">
               <a:ext uri="{FF2B5EF4-FFF2-40B4-BE49-F238E27FC236}">
-                <a16:creationId xmlns:a16="http://schemas.microsoft.com/office/drawing/2014/main" id="{3A2C992E-468A-4EE3-91A4-CB92D76F81DA}"/>
+                <a16:creationId xmlns:a16="http://schemas.microsoft.com/office/drawing/2014/main" id="{5032042C-A659-49D4-AC1D-E94714A03E47}"/>
               </a:ext>
             </a:extLst>
           </p:cNvPr>
@@ -9604,7 +9634,7 @@
           <p:cNvPr id="8" name="outcome-limit">
             <a:extLst xmlns:a="http://schemas.openxmlformats.org/drawingml/2006/main">
               <a:ext uri="{FF2B5EF4-FFF2-40B4-BE49-F238E27FC236}">
-                <a16:creationId xmlns:a16="http://schemas.microsoft.com/office/drawing/2014/main" id="{308E9FE0-8F19-4660-8B59-515A6913E330}"/>
+                <a16:creationId xmlns:a16="http://schemas.microsoft.com/office/drawing/2014/main" id="{FE32279F-7A26-4E38-824F-1A2F2D317700}"/>
               </a:ext>
             </a:extLst>
           </p:cNvPr>
@@ -9690,7 +9720,7 @@
           <p:cNvPr id="7" name="eyebrow">
             <a:extLst xmlns:a="http://schemas.openxmlformats.org/drawingml/2006/main">
               <a:ext uri="{FF2B5EF4-FFF2-40B4-BE49-F238E27FC236}">
-                <a16:creationId xmlns:a16="http://schemas.microsoft.com/office/drawing/2014/main" id="{DDA2EE2C-D306-4BCF-99E7-AC97BC177F15}"/>
+                <a16:creationId xmlns:a16="http://schemas.microsoft.com/office/drawing/2014/main" id="{4F5884AC-B5CD-4EC4-9E47-1CDB0BE02E9A}"/>
               </a:ext>
             </a:extLst>
           </p:cNvPr>
@@ -9747,7 +9777,7 @@
           <p:cNvPr id="2" name="slide-title">
             <a:extLst xmlns:a="http://schemas.openxmlformats.org/drawingml/2006/main">
               <a:ext uri="{FF2B5EF4-FFF2-40B4-BE49-F238E27FC236}">
-                <a16:creationId xmlns:a16="http://schemas.microsoft.com/office/drawing/2014/main" id="{C2CB5F93-255C-4CC0-90B3-E3B75BEB838B}"/>
+                <a16:creationId xmlns:a16="http://schemas.microsoft.com/office/drawing/2014/main" id="{AA947065-12C8-404F-9F45-EDD65D1733A2}"/>
               </a:ext>
             </a:extLst>
           </p:cNvPr>
@@ -9804,7 +9834,7 @@
           <p:cNvPr id="3" name="">
             <a:extLst xmlns:a="http://schemas.openxmlformats.org/drawingml/2006/main">
               <a:ext uri="{FF2B5EF4-FFF2-40B4-BE49-F238E27FC236}">
-                <a16:creationId xmlns:a16="http://schemas.microsoft.com/office/drawing/2014/main" id="{E589BE6C-67D1-433D-98F2-17765B184145}"/>
+                <a16:creationId xmlns:a16="http://schemas.microsoft.com/office/drawing/2014/main" id="{0DF9DA51-A344-4F0A-9C23-20423A9D07C8}"/>
               </a:ext>
             </a:extLst>
           </p:cNvPr>
@@ -9836,7 +9866,7 @@
           <p:cNvPr id="4" name="slide-number">
             <a:extLst xmlns:a="http://schemas.openxmlformats.org/drawingml/2006/main">
               <a:ext uri="{FF2B5EF4-FFF2-40B4-BE49-F238E27FC236}">
-                <a16:creationId xmlns:a16="http://schemas.microsoft.com/office/drawing/2014/main" id="{E7343EFD-F2CC-404A-BA0A-D4945536A8CA}"/>
+                <a16:creationId xmlns:a16="http://schemas.microsoft.com/office/drawing/2014/main" id="{58280F4F-ED06-49E6-9700-004E2B2C4D92}"/>
               </a:ext>
             </a:extLst>
           </p:cNvPr>
@@ -10138,7 +10168,7 @@
           <p:cNvPr id="6" name="slow">
             <a:extLst xmlns:a="http://schemas.openxmlformats.org/drawingml/2006/main">
               <a:ext uri="{FF2B5EF4-FFF2-40B4-BE49-F238E27FC236}">
-                <a16:creationId xmlns:a16="http://schemas.microsoft.com/office/drawing/2014/main" id="{8334E3AE-960A-4BBF-959C-A4710F629794}"/>
+                <a16:creationId xmlns:a16="http://schemas.microsoft.com/office/drawing/2014/main" id="{08BF162D-07F3-493F-89FB-77FF945C5794}"/>
               </a:ext>
             </a:extLst>
           </p:cNvPr>
@@ -10224,7 +10254,7 @@
           <p:cNvPr id="17" name="eyebrow">
             <a:extLst xmlns:a="http://schemas.openxmlformats.org/drawingml/2006/main">
               <a:ext uri="{FF2B5EF4-FFF2-40B4-BE49-F238E27FC236}">
-                <a16:creationId xmlns:a16="http://schemas.microsoft.com/office/drawing/2014/main" id="{F00E8413-762F-44BA-9E27-A07CF02A0AE8}"/>
+                <a16:creationId xmlns:a16="http://schemas.microsoft.com/office/drawing/2014/main" id="{8EAF7DB9-A4F1-45BC-9E4F-49FF69BD1916}"/>
               </a:ext>
             </a:extLst>
           </p:cNvPr>
@@ -10281,7 +10311,7 @@
           <p:cNvPr id="2" name="slide-title">
             <a:extLst xmlns:a="http://schemas.openxmlformats.org/drawingml/2006/main">
               <a:ext uri="{FF2B5EF4-FFF2-40B4-BE49-F238E27FC236}">
-                <a16:creationId xmlns:a16="http://schemas.microsoft.com/office/drawing/2014/main" id="{106F0359-1A1D-45FE-912D-30316E53E476}"/>
+                <a16:creationId xmlns:a16="http://schemas.microsoft.com/office/drawing/2014/main" id="{B3810B85-679D-4C39-B04E-C958D4667404}"/>
               </a:ext>
             </a:extLst>
           </p:cNvPr>
@@ -10338,7 +10368,7 @@
           <p:cNvPr id="3" name="">
             <a:extLst xmlns:a="http://schemas.openxmlformats.org/drawingml/2006/main">
               <a:ext uri="{FF2B5EF4-FFF2-40B4-BE49-F238E27FC236}">
-                <a16:creationId xmlns:a16="http://schemas.microsoft.com/office/drawing/2014/main" id="{AD32370F-B536-4B54-A3A5-BAC112241E9F}"/>
+                <a16:creationId xmlns:a16="http://schemas.microsoft.com/office/drawing/2014/main" id="{B4A0B3D9-972B-4170-AC84-19B5CDAC3297}"/>
               </a:ext>
             </a:extLst>
           </p:cNvPr>
@@ -10370,7 +10400,7 @@
           <p:cNvPr id="4" name="slide-number">
             <a:extLst xmlns:a="http://schemas.openxmlformats.org/drawingml/2006/main">
               <a:ext uri="{FF2B5EF4-FFF2-40B4-BE49-F238E27FC236}">
-                <a16:creationId xmlns:a16="http://schemas.microsoft.com/office/drawing/2014/main" id="{3F897BC2-7F94-4B8E-A770-215DFCEBC955}"/>
+                <a16:creationId xmlns:a16="http://schemas.microsoft.com/office/drawing/2014/main" id="{6526CDF9-80AB-499F-A548-66CD51D314EE}"/>
               </a:ext>
             </a:extLst>
           </p:cNvPr>
@@ -10427,7 +10457,7 @@
           <p:cNvPr id="5" name="">
             <a:extLst xmlns:a="http://schemas.openxmlformats.org/drawingml/2006/main">
               <a:ext uri="{FF2B5EF4-FFF2-40B4-BE49-F238E27FC236}">
-                <a16:creationId xmlns:a16="http://schemas.microsoft.com/office/drawing/2014/main" id="{7CFB5659-D0E2-426A-92A9-DADFA792F585}"/>
+                <a16:creationId xmlns:a16="http://schemas.microsoft.com/office/drawing/2014/main" id="{BE622F63-298D-4BCC-BB26-9BFDB9C12CBA}"/>
               </a:ext>
             </a:extLst>
           </p:cNvPr>
@@ -10459,7 +10489,7 @@
           <p:cNvPr id="6" name="deadlock-a">
             <a:extLst xmlns:a="http://schemas.openxmlformats.org/drawingml/2006/main">
               <a:ext uri="{FF2B5EF4-FFF2-40B4-BE49-F238E27FC236}">
-                <a16:creationId xmlns:a16="http://schemas.microsoft.com/office/drawing/2014/main" id="{9BF16BFC-3696-4604-AD9F-F5ED957A2C7B}"/>
+                <a16:creationId xmlns:a16="http://schemas.microsoft.com/office/drawing/2014/main" id="{11F50A90-8A2C-401E-B644-C75A605142C1}"/>
               </a:ext>
             </a:extLst>
           </p:cNvPr>
@@ -10539,7 +10569,7 @@
           <p:cNvPr id="7" name="">
             <a:extLst xmlns:a="http://schemas.openxmlformats.org/drawingml/2006/main">
               <a:ext uri="{FF2B5EF4-FFF2-40B4-BE49-F238E27FC236}">
-                <a16:creationId xmlns:a16="http://schemas.microsoft.com/office/drawing/2014/main" id="{AFCED55E-5E45-4525-9D90-5770DD6D20D2}"/>
+                <a16:creationId xmlns:a16="http://schemas.microsoft.com/office/drawing/2014/main" id="{AAE53842-4443-4583-8FF3-1A333B3B046D}"/>
               </a:ext>
             </a:extLst>
           </p:cNvPr>
@@ -10571,7 +10601,7 @@
           <p:cNvPr id="8" name="deadlock-b">
             <a:extLst xmlns:a="http://schemas.openxmlformats.org/drawingml/2006/main">
               <a:ext uri="{FF2B5EF4-FFF2-40B4-BE49-F238E27FC236}">
-                <a16:creationId xmlns:a16="http://schemas.microsoft.com/office/drawing/2014/main" id="{B6B99F89-5C99-408E-BFA1-ACAD6F3C2B55}"/>
+                <a16:creationId xmlns:a16="http://schemas.microsoft.com/office/drawing/2014/main" id="{3315906E-E8F7-4717-8BBB-3F348BDAF7BC}"/>
               </a:ext>
             </a:extLst>
           </p:cNvPr>
@@ -10651,7 +10681,7 @@
           <p:cNvPr id="9" name="">
             <a:extLst xmlns:a="http://schemas.openxmlformats.org/drawingml/2006/main">
               <a:ext uri="{FF2B5EF4-FFF2-40B4-BE49-F238E27FC236}">
-                <a16:creationId xmlns:a16="http://schemas.microsoft.com/office/drawing/2014/main" id="{475E24C4-7983-410C-8132-D55D51A84025}"/>
+                <a16:creationId xmlns:a16="http://schemas.microsoft.com/office/drawing/2014/main" id="{BC8DE987-1239-40B7-82BA-856FF0E674BF}"/>
               </a:ext>
             </a:extLst>
           </p:cNvPr>
@@ -10683,7 +10713,7 @@
           <p:cNvPr id="10" name="a-waits">
             <a:extLst xmlns:a="http://schemas.openxmlformats.org/drawingml/2006/main">
               <a:ext uri="{FF2B5EF4-FFF2-40B4-BE49-F238E27FC236}">
-                <a16:creationId xmlns:a16="http://schemas.microsoft.com/office/drawing/2014/main" id="{583BB5D2-C9A5-4CAF-A861-78F335DC8E74}"/>
+                <a16:creationId xmlns:a16="http://schemas.microsoft.com/office/drawing/2014/main" id="{6034E111-CFA9-42A8-8126-BE73BD2B7948}"/>
               </a:ext>
             </a:extLst>
           </p:cNvPr>
@@ -10740,7 +10770,7 @@
           <p:cNvPr id="11" name="">
             <a:extLst xmlns:a="http://schemas.openxmlformats.org/drawingml/2006/main">
               <a:ext uri="{FF2B5EF4-FFF2-40B4-BE49-F238E27FC236}">
-                <a16:creationId xmlns:a16="http://schemas.microsoft.com/office/drawing/2014/main" id="{2F031213-E95D-4D7D-884D-B2AFF2DDB6D3}"/>
+                <a16:creationId xmlns:a16="http://schemas.microsoft.com/office/drawing/2014/main" id="{79EA599E-D4AA-4D1A-8EC6-F044CF16101F}"/>
               </a:ext>
             </a:extLst>
           </p:cNvPr>
@@ -10772,7 +10802,7 @@
           <p:cNvPr id="12" name="">
             <a:extLst xmlns:a="http://schemas.openxmlformats.org/drawingml/2006/main">
               <a:ext uri="{FF2B5EF4-FFF2-40B4-BE49-F238E27FC236}">
-                <a16:creationId xmlns:a16="http://schemas.microsoft.com/office/drawing/2014/main" id="{41A2C470-9268-4F19-AA2F-1F4978C58A37}"/>
+                <a16:creationId xmlns:a16="http://schemas.microsoft.com/office/drawing/2014/main" id="{15376F10-2886-4C71-907C-337357DAD89D}"/>
               </a:ext>
             </a:extLst>
           </p:cNvPr>
@@ -10804,7 +10834,7 @@
           <p:cNvPr id="13" name="">
             <a:extLst xmlns:a="http://schemas.openxmlformats.org/drawingml/2006/main">
               <a:ext uri="{FF2B5EF4-FFF2-40B4-BE49-F238E27FC236}">
-                <a16:creationId xmlns:a16="http://schemas.microsoft.com/office/drawing/2014/main" id="{F1D58496-0C50-4736-90F7-5B9BD42AA8E8}"/>
+                <a16:creationId xmlns:a16="http://schemas.microsoft.com/office/drawing/2014/main" id="{AB3EF428-5F42-480F-8B92-E2E55E749288}"/>
               </a:ext>
             </a:extLst>
           </p:cNvPr>
@@ -10836,7 +10866,7 @@
           <p:cNvPr id="14" name="b-waits">
             <a:extLst xmlns:a="http://schemas.openxmlformats.org/drawingml/2006/main">
               <a:ext uri="{FF2B5EF4-FFF2-40B4-BE49-F238E27FC236}">
-                <a16:creationId xmlns:a16="http://schemas.microsoft.com/office/drawing/2014/main" id="{E28A0B81-7C74-4568-BF7C-1B37BD86CD5A}"/>
+                <a16:creationId xmlns:a16="http://schemas.microsoft.com/office/drawing/2014/main" id="{52DE5CE3-6484-4649-897D-BF1DCCA85144}"/>
               </a:ext>
             </a:extLst>
           </p:cNvPr>
@@ -10893,7 +10923,7 @@
           <p:cNvPr id="15" name="cycle">
             <a:extLst xmlns:a="http://schemas.openxmlformats.org/drawingml/2006/main">
               <a:ext uri="{FF2B5EF4-FFF2-40B4-BE49-F238E27FC236}">
-                <a16:creationId xmlns:a16="http://schemas.microsoft.com/office/drawing/2014/main" id="{5F91F740-8084-4DC6-AFC1-27EF0894787B}"/>
+                <a16:creationId xmlns:a16="http://schemas.microsoft.com/office/drawing/2014/main" id="{B448BC30-A7DB-4C20-81DA-1B40CE10AD9F}"/>
               </a:ext>
             </a:extLst>
           </p:cNvPr>
@@ -10950,7 +10980,7 @@
           <p:cNvPr id="16" name="deadlock-rule">
             <a:extLst xmlns:a="http://schemas.openxmlformats.org/drawingml/2006/main">
               <a:ext uri="{FF2B5EF4-FFF2-40B4-BE49-F238E27FC236}">
-                <a16:creationId xmlns:a16="http://schemas.microsoft.com/office/drawing/2014/main" id="{D136B62E-8498-4777-9FA7-01F5D28CE949}"/>
+                <a16:creationId xmlns:a16="http://schemas.microsoft.com/office/drawing/2014/main" id="{FA25FD7A-ABB1-4C44-BB4D-B52A3C02CD5B}"/>
               </a:ext>
             </a:extLst>
           </p:cNvPr>
@@ -11036,7 +11066,7 @@
           <p:cNvPr id="7" name="eyebrow">
             <a:extLst xmlns:a="http://schemas.openxmlformats.org/drawingml/2006/main">
               <a:ext uri="{FF2B5EF4-FFF2-40B4-BE49-F238E27FC236}">
-                <a16:creationId xmlns:a16="http://schemas.microsoft.com/office/drawing/2014/main" id="{6FCDE26C-CA37-48F9-8527-0FD25B54DD46}"/>
+                <a16:creationId xmlns:a16="http://schemas.microsoft.com/office/drawing/2014/main" id="{FC582DAB-6ADF-4B65-AD4A-FB9EEFE93E24}"/>
               </a:ext>
             </a:extLst>
           </p:cNvPr>
@@ -11093,7 +11123,7 @@
           <p:cNvPr id="2" name="slide-title">
             <a:extLst xmlns:a="http://schemas.openxmlformats.org/drawingml/2006/main">
               <a:ext uri="{FF2B5EF4-FFF2-40B4-BE49-F238E27FC236}">
-                <a16:creationId xmlns:a16="http://schemas.microsoft.com/office/drawing/2014/main" id="{07B76A5D-C2D2-42B0-A683-8AB7B56EB67F}"/>
+                <a16:creationId xmlns:a16="http://schemas.microsoft.com/office/drawing/2014/main" id="{7C8DF21C-AD43-459D-9A70-A4425797C575}"/>
               </a:ext>
             </a:extLst>
           </p:cNvPr>
@@ -11150,7 +11180,7 @@
           <p:cNvPr id="3" name="">
             <a:extLst xmlns:a="http://schemas.openxmlformats.org/drawingml/2006/main">
               <a:ext uri="{FF2B5EF4-FFF2-40B4-BE49-F238E27FC236}">
-                <a16:creationId xmlns:a16="http://schemas.microsoft.com/office/drawing/2014/main" id="{9B0BD1B9-ED7C-4903-9BED-DE37EE9CA7C4}"/>
+                <a16:creationId xmlns:a16="http://schemas.microsoft.com/office/drawing/2014/main" id="{E9E31118-B50B-4BC2-8A35-3E8EDA3E866F}"/>
               </a:ext>
             </a:extLst>
           </p:cNvPr>
@@ -11182,7 +11212,7 @@
           <p:cNvPr id="4" name="slide-number">
             <a:extLst xmlns:a="http://schemas.openxmlformats.org/drawingml/2006/main">
               <a:ext uri="{FF2B5EF4-FFF2-40B4-BE49-F238E27FC236}">
-                <a16:creationId xmlns:a16="http://schemas.microsoft.com/office/drawing/2014/main" id="{8B47CAAE-0168-4E34-BBF5-9EF5ADC782F4}"/>
+                <a16:creationId xmlns:a16="http://schemas.microsoft.com/office/drawing/2014/main" id="{7C8CB1A9-E5E1-4688-BCDA-619F0FD83683}"/>
               </a:ext>
             </a:extLst>
           </p:cNvPr>
@@ -11484,7 +11514,7 @@
           <p:cNvPr id="6" name="pair-meaning">
             <a:extLst xmlns:a="http://schemas.openxmlformats.org/drawingml/2006/main">
               <a:ext uri="{FF2B5EF4-FFF2-40B4-BE49-F238E27FC236}">
-                <a16:creationId xmlns:a16="http://schemas.microsoft.com/office/drawing/2014/main" id="{0F3BC609-D1F0-4F64-8686-C26098B11FB6}"/>
+                <a16:creationId xmlns:a16="http://schemas.microsoft.com/office/drawing/2014/main" id="{D2DB94B0-8086-47BF-9DBA-19454DE98D66}"/>
               </a:ext>
             </a:extLst>
           </p:cNvPr>
@@ -11570,7 +11600,7 @@
           <p:cNvPr id="9" name="eyebrow">
             <a:extLst xmlns:a="http://schemas.openxmlformats.org/drawingml/2006/main">
               <a:ext uri="{FF2B5EF4-FFF2-40B4-BE49-F238E27FC236}">
-                <a16:creationId xmlns:a16="http://schemas.microsoft.com/office/drawing/2014/main" id="{7F6DF03D-0E15-4FD4-9425-C27D03B1CBF3}"/>
+                <a16:creationId xmlns:a16="http://schemas.microsoft.com/office/drawing/2014/main" id="{E0FE72EB-A4F3-4821-B178-920B2AE39B8B}"/>
               </a:ext>
             </a:extLst>
           </p:cNvPr>
@@ -11627,7 +11657,7 @@
           <p:cNvPr id="2" name="slide-title">
             <a:extLst xmlns:a="http://schemas.openxmlformats.org/drawingml/2006/main">
               <a:ext uri="{FF2B5EF4-FFF2-40B4-BE49-F238E27FC236}">
-                <a16:creationId xmlns:a16="http://schemas.microsoft.com/office/drawing/2014/main" id="{21BD19CC-429F-47B7-8D72-AF3D21E231FC}"/>
+                <a16:creationId xmlns:a16="http://schemas.microsoft.com/office/drawing/2014/main" id="{88B7B094-76E2-4B1E-85F0-81CA1CBAAE3A}"/>
               </a:ext>
             </a:extLst>
           </p:cNvPr>
@@ -11684,7 +11714,7 @@
           <p:cNvPr id="3" name="">
             <a:extLst xmlns:a="http://schemas.openxmlformats.org/drawingml/2006/main">
               <a:ext uri="{FF2B5EF4-FFF2-40B4-BE49-F238E27FC236}">
-                <a16:creationId xmlns:a16="http://schemas.microsoft.com/office/drawing/2014/main" id="{E2328F44-0863-4F76-B224-4568033EBD1B}"/>
+                <a16:creationId xmlns:a16="http://schemas.microsoft.com/office/drawing/2014/main" id="{80F01157-9FDD-4436-8050-97034B7C1B93}"/>
               </a:ext>
             </a:extLst>
           </p:cNvPr>
@@ -11716,7 +11746,7 @@
           <p:cNvPr id="4" name="slide-number">
             <a:extLst xmlns:a="http://schemas.openxmlformats.org/drawingml/2006/main">
               <a:ext uri="{FF2B5EF4-FFF2-40B4-BE49-F238E27FC236}">
-                <a16:creationId xmlns:a16="http://schemas.microsoft.com/office/drawing/2014/main" id="{43D2DC3E-1492-4F31-BF11-A11CDF1BB1D6}"/>
+                <a16:creationId xmlns:a16="http://schemas.microsoft.com/office/drawing/2014/main" id="{E2791B53-8CDD-427C-B5D0-9B0F5F299196}"/>
               </a:ext>
             </a:extLst>
           </p:cNvPr>
@@ -11773,7 +11803,7 @@
           <p:cNvPr id="5" name="">
             <a:extLst xmlns:a="http://schemas.openxmlformats.org/drawingml/2006/main">
               <a:ext uri="{FF2B5EF4-FFF2-40B4-BE49-F238E27FC236}">
-                <a16:creationId xmlns:a16="http://schemas.microsoft.com/office/drawing/2014/main" id="{801F101D-99FD-4D9E-AF42-EAC1414A9D51}"/>
+                <a16:creationId xmlns:a16="http://schemas.microsoft.com/office/drawing/2014/main" id="{3CED0C05-807D-4E60-ADF9-58FB87DE3A33}"/>
               </a:ext>
             </a:extLst>
           </p:cNvPr>
@@ -11805,7 +11835,7 @@
           <p:cNvPr id="6" name="flags">
             <a:extLst xmlns:a="http://schemas.openxmlformats.org/drawingml/2006/main">
               <a:ext uri="{FF2B5EF4-FFF2-40B4-BE49-F238E27FC236}">
-                <a16:creationId xmlns:a16="http://schemas.microsoft.com/office/drawing/2014/main" id="{7D180F3E-C902-4E67-AD3E-2D4723496DEF}"/>
+                <a16:creationId xmlns:a16="http://schemas.microsoft.com/office/drawing/2014/main" id="{0929DF84-FFF1-47C7-8521-C44F96DD77C2}"/>
               </a:ext>
             </a:extLst>
           </p:cNvPr>
@@ -11908,7 +11938,7 @@
           <p:cNvPr id="7" name="connect">
             <a:extLst xmlns:a="http://schemas.openxmlformats.org/drawingml/2006/main">
               <a:ext uri="{FF2B5EF4-FFF2-40B4-BE49-F238E27FC236}">
-                <a16:creationId xmlns:a16="http://schemas.microsoft.com/office/drawing/2014/main" id="{3BAEDACE-8341-4146-B96F-5B223BECE510}"/>
+                <a16:creationId xmlns:a16="http://schemas.microsoft.com/office/drawing/2014/main" id="{4E7D0C2B-6E28-4B96-BBE7-45A0A97885FE}"/>
               </a:ext>
             </a:extLst>
           </p:cNvPr>
@@ -11955,7 +11985,7 @@
                 <a:ea typeface="Helvetica Neue"/>
                 <a:cs typeface="Helvetica Neue"/>
               </a:rPr>
-              <a:t>Colab: File &gt; Upload notebook.</a:t>
+              <a:t>Lab page: Open in Colab, then save a copy in Drive.</a:t>
             </a:r>
           </a:p>
           <a:p xmlns:a="http://schemas.openxmlformats.org/drawingml/2006/main">
@@ -12011,7 +12041,7 @@
           <p:cNvPr id="8" name="mechanics">
             <a:extLst xmlns:a="http://schemas.openxmlformats.org/drawingml/2006/main">
               <a:ext uri="{FF2B5EF4-FFF2-40B4-BE49-F238E27FC236}">
-                <a16:creationId xmlns:a16="http://schemas.microsoft.com/office/drawing/2014/main" id="{D555DF0C-6E46-4FE7-AB44-6F33BAFD571C}"/>
+                <a16:creationId xmlns:a16="http://schemas.microsoft.com/office/drawing/2014/main" id="{7D79320F-4B6D-4443-B971-761108CF2AA4}"/>
               </a:ext>
             </a:extLst>
           </p:cNvPr>
@@ -12097,7 +12127,7 @@
           <p:cNvPr id="9" name="eyebrow">
             <a:extLst xmlns:a="http://schemas.openxmlformats.org/drawingml/2006/main">
               <a:ext uri="{FF2B5EF4-FFF2-40B4-BE49-F238E27FC236}">
-                <a16:creationId xmlns:a16="http://schemas.microsoft.com/office/drawing/2014/main" id="{5A61FEB0-78E3-4854-8C67-4EA487B9C669}"/>
+                <a16:creationId xmlns:a16="http://schemas.microsoft.com/office/drawing/2014/main" id="{57BAC73E-D2A7-4D4A-9349-68DB9CFB10DD}"/>
               </a:ext>
             </a:extLst>
           </p:cNvPr>
@@ -12154,7 +12184,7 @@
           <p:cNvPr id="2" name="slide-title">
             <a:extLst xmlns:a="http://schemas.openxmlformats.org/drawingml/2006/main">
               <a:ext uri="{FF2B5EF4-FFF2-40B4-BE49-F238E27FC236}">
-                <a16:creationId xmlns:a16="http://schemas.microsoft.com/office/drawing/2014/main" id="{169788C0-F17A-41C6-A084-FEDA1511C2B5}"/>
+                <a16:creationId xmlns:a16="http://schemas.microsoft.com/office/drawing/2014/main" id="{9E49A496-ADB7-44D5-A8FE-A3202E53D6E8}"/>
               </a:ext>
             </a:extLst>
           </p:cNvPr>
@@ -12211,7 +12241,7 @@
           <p:cNvPr id="3" name="">
             <a:extLst xmlns:a="http://schemas.openxmlformats.org/drawingml/2006/main">
               <a:ext uri="{FF2B5EF4-FFF2-40B4-BE49-F238E27FC236}">
-                <a16:creationId xmlns:a16="http://schemas.microsoft.com/office/drawing/2014/main" id="{2033DA46-B7AD-4A2D-BDAB-1D52B09DB0A1}"/>
+                <a16:creationId xmlns:a16="http://schemas.microsoft.com/office/drawing/2014/main" id="{7EEB1497-A607-436A-AE81-FCFD58057B31}"/>
               </a:ext>
             </a:extLst>
           </p:cNvPr>
@@ -12243,7 +12273,7 @@
           <p:cNvPr id="4" name="slide-number">
             <a:extLst xmlns:a="http://schemas.openxmlformats.org/drawingml/2006/main">
               <a:ext uri="{FF2B5EF4-FFF2-40B4-BE49-F238E27FC236}">
-                <a16:creationId xmlns:a16="http://schemas.microsoft.com/office/drawing/2014/main" id="{C5F948FE-80C2-4980-AECF-067FD85486C9}"/>
+                <a16:creationId xmlns:a16="http://schemas.microsoft.com/office/drawing/2014/main" id="{7AA75051-BBE8-43C6-8A02-1A3B18F38B94}"/>
               </a:ext>
             </a:extLst>
           </p:cNvPr>
@@ -12300,7 +12330,7 @@
           <p:cNvPr id="5" name="lab2">
             <a:extLst xmlns:a="http://schemas.openxmlformats.org/drawingml/2006/main">
               <a:ext uri="{FF2B5EF4-FFF2-40B4-BE49-F238E27FC236}">
-                <a16:creationId xmlns:a16="http://schemas.microsoft.com/office/drawing/2014/main" id="{6A1FFE16-44A7-4F6F-B3A6-AAB23C07B421}"/>
+                <a16:creationId xmlns:a16="http://schemas.microsoft.com/office/drawing/2014/main" id="{A88B9639-336B-4EEF-BD8D-47F887441713}"/>
               </a:ext>
             </a:extLst>
           </p:cNvPr>
@@ -12357,7 +12387,7 @@
           <p:cNvPr id="6" name="lab2-action">
             <a:extLst xmlns:a="http://schemas.openxmlformats.org/drawingml/2006/main">
               <a:ext uri="{FF2B5EF4-FFF2-40B4-BE49-F238E27FC236}">
-                <a16:creationId xmlns:a16="http://schemas.microsoft.com/office/drawing/2014/main" id="{B5176E07-D1B4-4C2C-8DC8-D67D751CCEF9}"/>
+                <a16:creationId xmlns:a16="http://schemas.microsoft.com/office/drawing/2014/main" id="{102DE16F-6586-49F0-AD06-8CCD0E2CE17B}"/>
               </a:ext>
             </a:extLst>
           </p:cNvPr>
@@ -12437,7 +12467,7 @@
           <p:cNvPr id="7" name="lab2-explain">
             <a:extLst xmlns:a="http://schemas.openxmlformats.org/drawingml/2006/main">
               <a:ext uri="{FF2B5EF4-FFF2-40B4-BE49-F238E27FC236}">
-                <a16:creationId xmlns:a16="http://schemas.microsoft.com/office/drawing/2014/main" id="{B806DA2C-1FF8-42E5-8695-B6A2292C07E7}"/>
+                <a16:creationId xmlns:a16="http://schemas.microsoft.com/office/drawing/2014/main" id="{22F32B02-4C01-4F71-90E9-AE8C988647BA}"/>
               </a:ext>
             </a:extLst>
           </p:cNvPr>
@@ -12494,7 +12524,7 @@
           <p:cNvPr id="8" name="lab2-submit">
             <a:extLst xmlns:a="http://schemas.openxmlformats.org/drawingml/2006/main">
               <a:ext uri="{FF2B5EF4-FFF2-40B4-BE49-F238E27FC236}">
-                <a16:creationId xmlns:a16="http://schemas.microsoft.com/office/drawing/2014/main" id="{B8731D26-30B3-47F8-882F-881E85A8B01C}"/>
+                <a16:creationId xmlns:a16="http://schemas.microsoft.com/office/drawing/2014/main" id="{C2D7D17B-AFB8-4ABD-BBEF-BB8D707EDF53}"/>
               </a:ext>
             </a:extLst>
           </p:cNvPr>
@@ -12580,7 +12610,7 @@
           <p:cNvPr id="9" name="eyebrow">
             <a:extLst xmlns:a="http://schemas.openxmlformats.org/drawingml/2006/main">
               <a:ext uri="{FF2B5EF4-FFF2-40B4-BE49-F238E27FC236}">
-                <a16:creationId xmlns:a16="http://schemas.microsoft.com/office/drawing/2014/main" id="{5982EA75-EB15-497C-AB4B-7F6B0F207F69}"/>
+                <a16:creationId xmlns:a16="http://schemas.microsoft.com/office/drawing/2014/main" id="{DE53486C-4EA6-415F-A6E7-1708019FDAC6}"/>
               </a:ext>
             </a:extLst>
           </p:cNvPr>
@@ -12637,7 +12667,7 @@
           <p:cNvPr id="2" name="slide-title">
             <a:extLst xmlns:a="http://schemas.openxmlformats.org/drawingml/2006/main">
               <a:ext uri="{FF2B5EF4-FFF2-40B4-BE49-F238E27FC236}">
-                <a16:creationId xmlns:a16="http://schemas.microsoft.com/office/drawing/2014/main" id="{7DE72EAB-ADC5-4576-939C-76244634EF93}"/>
+                <a16:creationId xmlns:a16="http://schemas.microsoft.com/office/drawing/2014/main" id="{60B33121-F811-4889-A35E-5F3558856DE6}"/>
               </a:ext>
             </a:extLst>
           </p:cNvPr>
@@ -12694,7 +12724,7 @@
           <p:cNvPr id="3" name="">
             <a:extLst xmlns:a="http://schemas.openxmlformats.org/drawingml/2006/main">
               <a:ext uri="{FF2B5EF4-FFF2-40B4-BE49-F238E27FC236}">
-                <a16:creationId xmlns:a16="http://schemas.microsoft.com/office/drawing/2014/main" id="{8C5EDDAC-0596-460E-95FB-833008776DD2}"/>
+                <a16:creationId xmlns:a16="http://schemas.microsoft.com/office/drawing/2014/main" id="{72F8F3A2-A947-4061-B718-7A0948BDC0F5}"/>
               </a:ext>
             </a:extLst>
           </p:cNvPr>
@@ -12726,7 +12756,7 @@
           <p:cNvPr id="4" name="slide-number">
             <a:extLst xmlns:a="http://schemas.openxmlformats.org/drawingml/2006/main">
               <a:ext uri="{FF2B5EF4-FFF2-40B4-BE49-F238E27FC236}">
-                <a16:creationId xmlns:a16="http://schemas.microsoft.com/office/drawing/2014/main" id="{438616C3-3B90-4725-BF14-106717B02E7F}"/>
+                <a16:creationId xmlns:a16="http://schemas.microsoft.com/office/drawing/2014/main" id="{16D69F16-E9A2-45D4-941D-14AB623F4770}"/>
               </a:ext>
             </a:extLst>
           </p:cNvPr>
@@ -12783,7 +12813,7 @@
           <p:cNvPr id="5" name="">
             <a:extLst xmlns:a="http://schemas.openxmlformats.org/drawingml/2006/main">
               <a:ext uri="{FF2B5EF4-FFF2-40B4-BE49-F238E27FC236}">
-                <a16:creationId xmlns:a16="http://schemas.microsoft.com/office/drawing/2014/main" id="{10956F89-E985-4D54-90EF-AAE6A2C2FED3}"/>
+                <a16:creationId xmlns:a16="http://schemas.microsoft.com/office/drawing/2014/main" id="{9028C468-EF8C-4409-A630-9A06AF0720BE}"/>
               </a:ext>
             </a:extLst>
           </p:cNvPr>
@@ -12815,7 +12845,7 @@
           <p:cNvPr id="6" name="sample-update">
             <a:extLst xmlns:a="http://schemas.openxmlformats.org/drawingml/2006/main">
               <a:ext uri="{FF2B5EF4-FFF2-40B4-BE49-F238E27FC236}">
-                <a16:creationId xmlns:a16="http://schemas.microsoft.com/office/drawing/2014/main" id="{8D2ED338-1788-4446-A66A-334C91605D9E}"/>
+                <a16:creationId xmlns:a16="http://schemas.microsoft.com/office/drawing/2014/main" id="{D0EC1275-453F-49DA-9397-73FC45D91B16}"/>
               </a:ext>
             </a:extLst>
           </p:cNvPr>
@@ -12872,7 +12902,7 @@
           <p:cNvPr id="7" name="interpret">
             <a:extLst xmlns:a="http://schemas.openxmlformats.org/drawingml/2006/main">
               <a:ext uri="{FF2B5EF4-FFF2-40B4-BE49-F238E27FC236}">
-                <a16:creationId xmlns:a16="http://schemas.microsoft.com/office/drawing/2014/main" id="{B5541B99-2310-48E8-87D1-216F0D18E1C0}"/>
+                <a16:creationId xmlns:a16="http://schemas.microsoft.com/office/drawing/2014/main" id="{EFA5FBA4-90D1-4845-91F7-3A398C5D2FD1}"/>
               </a:ext>
             </a:extLst>
           </p:cNvPr>
@@ -12929,7 +12959,7 @@
           <p:cNvPr id="8" name="source-kind">
             <a:extLst xmlns:a="http://schemas.openxmlformats.org/drawingml/2006/main">
               <a:ext uri="{FF2B5EF4-FFF2-40B4-BE49-F238E27FC236}">
-                <a16:creationId xmlns:a16="http://schemas.microsoft.com/office/drawing/2014/main" id="{2CCF988D-926B-48DF-BCE9-74BFB28B023D}"/>
+                <a16:creationId xmlns:a16="http://schemas.microsoft.com/office/drawing/2014/main" id="{FBADCC9D-03D5-4FFE-BF3C-CCD91297EF77}"/>
               </a:ext>
             </a:extLst>
           </p:cNvPr>
@@ -13015,7 +13045,7 @@
           <p:cNvPr id="8" name="eyebrow">
             <a:extLst xmlns:a="http://schemas.openxmlformats.org/drawingml/2006/main">
               <a:ext uri="{FF2B5EF4-FFF2-40B4-BE49-F238E27FC236}">
-                <a16:creationId xmlns:a16="http://schemas.microsoft.com/office/drawing/2014/main" id="{8D9DE1DE-8758-44E2-894F-110564D467D4}"/>
+                <a16:creationId xmlns:a16="http://schemas.microsoft.com/office/drawing/2014/main" id="{9DEA49AC-BADE-4E93-A69E-31619EA29B56}"/>
               </a:ext>
             </a:extLst>
           </p:cNvPr>
@@ -13072,7 +13102,7 @@
           <p:cNvPr id="2" name="slide-title">
             <a:extLst xmlns:a="http://schemas.openxmlformats.org/drawingml/2006/main">
               <a:ext uri="{FF2B5EF4-FFF2-40B4-BE49-F238E27FC236}">
-                <a16:creationId xmlns:a16="http://schemas.microsoft.com/office/drawing/2014/main" id="{0D3D8D2E-84A7-4201-8BD6-19A4DDAA251A}"/>
+                <a16:creationId xmlns:a16="http://schemas.microsoft.com/office/drawing/2014/main" id="{19511CC4-E3E8-4F62-86C9-517E9AEF36B2}"/>
               </a:ext>
             </a:extLst>
           </p:cNvPr>
@@ -13129,7 +13159,7 @@
           <p:cNvPr id="3" name="">
             <a:extLst xmlns:a="http://schemas.openxmlformats.org/drawingml/2006/main">
               <a:ext uri="{FF2B5EF4-FFF2-40B4-BE49-F238E27FC236}">
-                <a16:creationId xmlns:a16="http://schemas.microsoft.com/office/drawing/2014/main" id="{B1CEC076-8046-4EFC-8597-C018F529FC8F}"/>
+                <a16:creationId xmlns:a16="http://schemas.microsoft.com/office/drawing/2014/main" id="{676CBED8-1A5F-4DEF-867A-60A24D1B3494}"/>
               </a:ext>
             </a:extLst>
           </p:cNvPr>
@@ -13161,7 +13191,7 @@
           <p:cNvPr id="4" name="slide-number">
             <a:extLst xmlns:a="http://schemas.openxmlformats.org/drawingml/2006/main">
               <a:ext uri="{FF2B5EF4-FFF2-40B4-BE49-F238E27FC236}">
-                <a16:creationId xmlns:a16="http://schemas.microsoft.com/office/drawing/2014/main" id="{DF7B5A94-BCFE-4D22-A484-A102A8216220}"/>
+                <a16:creationId xmlns:a16="http://schemas.microsoft.com/office/drawing/2014/main" id="{13B035D3-FBFE-423F-A0CB-587E912A2F6B}"/>
               </a:ext>
             </a:extLst>
           </p:cNvPr>
@@ -13218,7 +13248,7 @@
           <p:cNvPr id="5" name="summary">
             <a:extLst xmlns:a="http://schemas.openxmlformats.org/drawingml/2006/main">
               <a:ext uri="{FF2B5EF4-FFF2-40B4-BE49-F238E27FC236}">
-                <a16:creationId xmlns:a16="http://schemas.microsoft.com/office/drawing/2014/main" id="{BD696947-6BC3-438C-96A6-17EBF42EB7F6}"/>
+                <a16:creationId xmlns:a16="http://schemas.microsoft.com/office/drawing/2014/main" id="{32268515-DCA8-46E8-88DC-904942007FD7}"/>
               </a:ext>
             </a:extLst>
           </p:cNvPr>
@@ -13321,7 +13351,7 @@
           <p:cNvPr id="6" name="synthesis">
             <a:extLst xmlns:a="http://schemas.openxmlformats.org/drawingml/2006/main">
               <a:ext uri="{FF2B5EF4-FFF2-40B4-BE49-F238E27FC236}">
-                <a16:creationId xmlns:a16="http://schemas.microsoft.com/office/drawing/2014/main" id="{69971D87-0524-46AD-99EE-1FA5B1B99A85}"/>
+                <a16:creationId xmlns:a16="http://schemas.microsoft.com/office/drawing/2014/main" id="{B604F771-994E-4C2B-8957-F08FD9D20E87}"/>
               </a:ext>
             </a:extLst>
           </p:cNvPr>
@@ -13378,7 +13408,7 @@
           <p:cNvPr id="7" name="next">
             <a:extLst xmlns:a="http://schemas.openxmlformats.org/drawingml/2006/main">
               <a:ext uri="{FF2B5EF4-FFF2-40B4-BE49-F238E27FC236}">
-                <a16:creationId xmlns:a16="http://schemas.microsoft.com/office/drawing/2014/main" id="{A8F951AD-74B0-4421-941A-D45C2FC69AE8}"/>
+                <a16:creationId xmlns:a16="http://schemas.microsoft.com/office/drawing/2014/main" id="{DB58AFA3-93D5-487E-A420-C135D4BBA5C4}"/>
               </a:ext>
             </a:extLst>
           </p:cNvPr>
@@ -13464,7 +13494,7 @@
           <p:cNvPr id="17" name="eyebrow">
             <a:extLst xmlns:a="http://schemas.openxmlformats.org/drawingml/2006/main">
               <a:ext uri="{FF2B5EF4-FFF2-40B4-BE49-F238E27FC236}">
-                <a16:creationId xmlns:a16="http://schemas.microsoft.com/office/drawing/2014/main" id="{72ED6F84-9AE0-40DD-97E6-50EE6CFFC3BE}"/>
+                <a16:creationId xmlns:a16="http://schemas.microsoft.com/office/drawing/2014/main" id="{EDE0ABD4-33BE-4ABA-BFE4-22CF7190DC1C}"/>
               </a:ext>
             </a:extLst>
           </p:cNvPr>
@@ -13521,7 +13551,7 @@
           <p:cNvPr id="2" name="slide-title">
             <a:extLst xmlns:a="http://schemas.openxmlformats.org/drawingml/2006/main">
               <a:ext uri="{FF2B5EF4-FFF2-40B4-BE49-F238E27FC236}">
-                <a16:creationId xmlns:a16="http://schemas.microsoft.com/office/drawing/2014/main" id="{F79B37EA-F286-43D1-B3D7-CFC1E2BDCF3C}"/>
+                <a16:creationId xmlns:a16="http://schemas.microsoft.com/office/drawing/2014/main" id="{826F38BB-555E-4675-B3D9-CD62B925B3FD}"/>
               </a:ext>
             </a:extLst>
           </p:cNvPr>
@@ -13578,7 +13608,7 @@
           <p:cNvPr id="3" name="">
             <a:extLst xmlns:a="http://schemas.openxmlformats.org/drawingml/2006/main">
               <a:ext uri="{FF2B5EF4-FFF2-40B4-BE49-F238E27FC236}">
-                <a16:creationId xmlns:a16="http://schemas.microsoft.com/office/drawing/2014/main" id="{32F34CDE-32C8-4929-8B37-67DF65AFF86E}"/>
+                <a16:creationId xmlns:a16="http://schemas.microsoft.com/office/drawing/2014/main" id="{BC813853-F604-4450-97E0-8AFB695B0BCB}"/>
               </a:ext>
             </a:extLst>
           </p:cNvPr>
@@ -13610,7 +13640,7 @@
           <p:cNvPr id="4" name="slide-number">
             <a:extLst xmlns:a="http://schemas.openxmlformats.org/drawingml/2006/main">
               <a:ext uri="{FF2B5EF4-FFF2-40B4-BE49-F238E27FC236}">
-                <a16:creationId xmlns:a16="http://schemas.microsoft.com/office/drawing/2014/main" id="{32BF14AF-AD69-4781-B313-CEBD0EC8AD3D}"/>
+                <a16:creationId xmlns:a16="http://schemas.microsoft.com/office/drawing/2014/main" id="{B221BDB5-DBAC-4675-A5DB-9A2A72359F5F}"/>
               </a:ext>
             </a:extLst>
           </p:cNvPr>
@@ -13667,7 +13697,7 @@
           <p:cNvPr id="5" name="">
             <a:extLst xmlns:a="http://schemas.openxmlformats.org/drawingml/2006/main">
               <a:ext uri="{FF2B5EF4-FFF2-40B4-BE49-F238E27FC236}">
-                <a16:creationId xmlns:a16="http://schemas.microsoft.com/office/drawing/2014/main" id="{46101F87-F76D-4D46-A909-1D8A5782F1FC}"/>
+                <a16:creationId xmlns:a16="http://schemas.microsoft.com/office/drawing/2014/main" id="{A774F2CD-1500-4FDB-AD0D-A1101B2248BC}"/>
               </a:ext>
             </a:extLst>
           </p:cNvPr>
@@ -13699,7 +13729,7 @@
           <p:cNvPr id="6" name="begin">
             <a:extLst xmlns:a="http://schemas.openxmlformats.org/drawingml/2006/main">
               <a:ext uri="{FF2B5EF4-FFF2-40B4-BE49-F238E27FC236}">
-                <a16:creationId xmlns:a16="http://schemas.microsoft.com/office/drawing/2014/main" id="{03B13B62-2263-4F49-B91F-1318F60D3ECD}"/>
+                <a16:creationId xmlns:a16="http://schemas.microsoft.com/office/drawing/2014/main" id="{F292FD1D-A734-4DEF-983E-770D4BA534EB}"/>
               </a:ext>
             </a:extLst>
           </p:cNvPr>
@@ -13779,7 +13809,7 @@
           <p:cNvPr id="7" name="">
             <a:extLst xmlns:a="http://schemas.openxmlformats.org/drawingml/2006/main">
               <a:ext uri="{FF2B5EF4-FFF2-40B4-BE49-F238E27FC236}">
-                <a16:creationId xmlns:a16="http://schemas.microsoft.com/office/drawing/2014/main" id="{E1045150-9EA1-4285-89F6-1B652C84DF3F}"/>
+                <a16:creationId xmlns:a16="http://schemas.microsoft.com/office/drawing/2014/main" id="{E4412517-F5C6-4576-80C7-F05C0795C1EA}"/>
               </a:ext>
             </a:extLst>
           </p:cNvPr>
@@ -13811,7 +13841,7 @@
           <p:cNvPr id="8" name="">
             <a:extLst xmlns:a="http://schemas.openxmlformats.org/drawingml/2006/main">
               <a:ext uri="{FF2B5EF4-FFF2-40B4-BE49-F238E27FC236}">
-                <a16:creationId xmlns:a16="http://schemas.microsoft.com/office/drawing/2014/main" id="{20A67ECD-6DC8-4AD2-AC1D-B9CCA4A0F751}"/>
+                <a16:creationId xmlns:a16="http://schemas.microsoft.com/office/drawing/2014/main" id="{C848783E-B1A3-496A-A83C-9B6CF35BBC18}"/>
               </a:ext>
             </a:extLst>
           </p:cNvPr>
@@ -13843,7 +13873,7 @@
           <p:cNvPr id="9" name="work">
             <a:extLst xmlns:a="http://schemas.openxmlformats.org/drawingml/2006/main">
               <a:ext uri="{FF2B5EF4-FFF2-40B4-BE49-F238E27FC236}">
-                <a16:creationId xmlns:a16="http://schemas.microsoft.com/office/drawing/2014/main" id="{D31974DB-8A24-4885-B8F1-A64C286CE55E}"/>
+                <a16:creationId xmlns:a16="http://schemas.microsoft.com/office/drawing/2014/main" id="{6720F450-36E2-4F52-B016-F483BCF333E2}"/>
               </a:ext>
             </a:extLst>
           </p:cNvPr>
@@ -13923,7 +13953,7 @@
           <p:cNvPr id="10" name="">
             <a:extLst xmlns:a="http://schemas.openxmlformats.org/drawingml/2006/main">
               <a:ext uri="{FF2B5EF4-FFF2-40B4-BE49-F238E27FC236}">
-                <a16:creationId xmlns:a16="http://schemas.microsoft.com/office/drawing/2014/main" id="{F36D90FF-6C62-41EA-87AB-9AAD4D02E3B8}"/>
+                <a16:creationId xmlns:a16="http://schemas.microsoft.com/office/drawing/2014/main" id="{D9003930-2912-4A25-8CD9-6503FF03281A}"/>
               </a:ext>
             </a:extLst>
           </p:cNvPr>
@@ -13955,7 +13985,7 @@
           <p:cNvPr id="11" name="">
             <a:extLst xmlns:a="http://schemas.openxmlformats.org/drawingml/2006/main">
               <a:ext uri="{FF2B5EF4-FFF2-40B4-BE49-F238E27FC236}">
-                <a16:creationId xmlns:a16="http://schemas.microsoft.com/office/drawing/2014/main" id="{8C850400-9A38-4B3F-B3F3-6E63020CF650}"/>
+                <a16:creationId xmlns:a16="http://schemas.microsoft.com/office/drawing/2014/main" id="{B47FC5F0-C09C-455E-9F2D-E565EF7E5841}"/>
               </a:ext>
             </a:extLst>
           </p:cNvPr>
@@ -13987,7 +14017,7 @@
           <p:cNvPr id="12" name="">
             <a:extLst xmlns:a="http://schemas.openxmlformats.org/drawingml/2006/main">
               <a:ext uri="{FF2B5EF4-FFF2-40B4-BE49-F238E27FC236}">
-                <a16:creationId xmlns:a16="http://schemas.microsoft.com/office/drawing/2014/main" id="{4A7EA7D6-5EE9-4CEE-8DD1-619DD532140C}"/>
+                <a16:creationId xmlns:a16="http://schemas.microsoft.com/office/drawing/2014/main" id="{E2030B7B-9902-4601-835C-326335D8B7E0}"/>
               </a:ext>
             </a:extLst>
           </p:cNvPr>
@@ -14019,7 +14049,7 @@
           <p:cNvPr id="13" name="commit">
             <a:extLst xmlns:a="http://schemas.openxmlformats.org/drawingml/2006/main">
               <a:ext uri="{FF2B5EF4-FFF2-40B4-BE49-F238E27FC236}">
-                <a16:creationId xmlns:a16="http://schemas.microsoft.com/office/drawing/2014/main" id="{5E0C2814-6C71-4B8C-9311-FCFFB57FFC8C}"/>
+                <a16:creationId xmlns:a16="http://schemas.microsoft.com/office/drawing/2014/main" id="{7875C11B-5D3A-4F06-8D9E-F99B6671A9D6}"/>
               </a:ext>
             </a:extLst>
           </p:cNvPr>
@@ -14099,7 +14129,7 @@
           <p:cNvPr id="14" name="">
             <a:extLst xmlns:a="http://schemas.openxmlformats.org/drawingml/2006/main">
               <a:ext uri="{FF2B5EF4-FFF2-40B4-BE49-F238E27FC236}">
-                <a16:creationId xmlns:a16="http://schemas.microsoft.com/office/drawing/2014/main" id="{612D9326-92EB-4544-AE83-A493FA520F5B}"/>
+                <a16:creationId xmlns:a16="http://schemas.microsoft.com/office/drawing/2014/main" id="{60051C8D-FCC5-4011-BE3F-B779F9EF28AC}"/>
               </a:ext>
             </a:extLst>
           </p:cNvPr>
@@ -14131,7 +14161,7 @@
           <p:cNvPr id="15" name="rollback">
             <a:extLst xmlns:a="http://schemas.openxmlformats.org/drawingml/2006/main">
               <a:ext uri="{FF2B5EF4-FFF2-40B4-BE49-F238E27FC236}">
-                <a16:creationId xmlns:a16="http://schemas.microsoft.com/office/drawing/2014/main" id="{51305D26-8602-463A-856C-B9EF93CBAF6D}"/>
+                <a16:creationId xmlns:a16="http://schemas.microsoft.com/office/drawing/2014/main" id="{EF4CC15A-BF5A-4A75-8814-AF987064EE3B}"/>
               </a:ext>
             </a:extLst>
           </p:cNvPr>
@@ -14211,7 +14241,7 @@
           <p:cNvPr id="16" name="boundary">
             <a:extLst xmlns:a="http://schemas.openxmlformats.org/drawingml/2006/main">
               <a:ext uri="{FF2B5EF4-FFF2-40B4-BE49-F238E27FC236}">
-                <a16:creationId xmlns:a16="http://schemas.microsoft.com/office/drawing/2014/main" id="{3A589DB3-0C65-42D6-A29E-DA1C77231047}"/>
+                <a16:creationId xmlns:a16="http://schemas.microsoft.com/office/drawing/2014/main" id="{E3D7A150-E1EB-466C-903A-2B7F72D0DF3A}"/>
               </a:ext>
             </a:extLst>
           </p:cNvPr>
@@ -14297,7 +14327,7 @@
           <p:cNvPr id="8" name="eyebrow">
             <a:extLst xmlns:a="http://schemas.openxmlformats.org/drawingml/2006/main">
               <a:ext uri="{FF2B5EF4-FFF2-40B4-BE49-F238E27FC236}">
-                <a16:creationId xmlns:a16="http://schemas.microsoft.com/office/drawing/2014/main" id="{D5C6D7B6-3896-45FB-B49A-72D09C8AB895}"/>
+                <a16:creationId xmlns:a16="http://schemas.microsoft.com/office/drawing/2014/main" id="{06DA6D27-0E2C-421B-8467-EAEC4ABA0886}"/>
               </a:ext>
             </a:extLst>
           </p:cNvPr>
@@ -14354,7 +14384,7 @@
           <p:cNvPr id="2" name="slide-title">
             <a:extLst xmlns:a="http://schemas.openxmlformats.org/drawingml/2006/main">
               <a:ext uri="{FF2B5EF4-FFF2-40B4-BE49-F238E27FC236}">
-                <a16:creationId xmlns:a16="http://schemas.microsoft.com/office/drawing/2014/main" id="{28D6A395-8621-4E23-9E2D-C827B4C12785}"/>
+                <a16:creationId xmlns:a16="http://schemas.microsoft.com/office/drawing/2014/main" id="{A1D8C996-F885-4C60-9186-F76999DA9A26}"/>
               </a:ext>
             </a:extLst>
           </p:cNvPr>
@@ -14411,7 +14441,7 @@
           <p:cNvPr id="3" name="">
             <a:extLst xmlns:a="http://schemas.openxmlformats.org/drawingml/2006/main">
               <a:ext uri="{FF2B5EF4-FFF2-40B4-BE49-F238E27FC236}">
-                <a16:creationId xmlns:a16="http://schemas.microsoft.com/office/drawing/2014/main" id="{A5F0E04C-B202-4730-8C6B-548A43603540}"/>
+                <a16:creationId xmlns:a16="http://schemas.microsoft.com/office/drawing/2014/main" id="{FE021676-EE78-4438-AA7E-B9AE577B63E5}"/>
               </a:ext>
             </a:extLst>
           </p:cNvPr>
@@ -14443,7 +14473,7 @@
           <p:cNvPr id="4" name="slide-number">
             <a:extLst xmlns:a="http://schemas.openxmlformats.org/drawingml/2006/main">
               <a:ext uri="{FF2B5EF4-FFF2-40B4-BE49-F238E27FC236}">
-                <a16:creationId xmlns:a16="http://schemas.microsoft.com/office/drawing/2014/main" id="{8AAEF433-1E50-410E-8ADF-9601AAA11963}"/>
+                <a16:creationId xmlns:a16="http://schemas.microsoft.com/office/drawing/2014/main" id="{FBFB5B3E-B5EB-4A70-BD1E-3554161F4DCA}"/>
               </a:ext>
             </a:extLst>
           </p:cNvPr>
@@ -14500,7 +14530,7 @@
           <p:cNvPr id="5" name="">
             <a:extLst xmlns:a="http://schemas.openxmlformats.org/drawingml/2006/main">
               <a:ext uri="{FF2B5EF4-FFF2-40B4-BE49-F238E27FC236}">
-                <a16:creationId xmlns:a16="http://schemas.microsoft.com/office/drawing/2014/main" id="{31DC8964-C6B0-4E0F-A1E8-D09E02F279A2}"/>
+                <a16:creationId xmlns:a16="http://schemas.microsoft.com/office/drawing/2014/main" id="{B3912175-4F6A-4C04-9C3F-91B880622377}"/>
               </a:ext>
             </a:extLst>
           </p:cNvPr>
@@ -14532,7 +14562,7 @@
           <p:cNvPr id="6" name="pair-sql">
             <a:extLst xmlns:a="http://schemas.openxmlformats.org/drawingml/2006/main">
               <a:ext uri="{FF2B5EF4-FFF2-40B4-BE49-F238E27FC236}">
-                <a16:creationId xmlns:a16="http://schemas.microsoft.com/office/drawing/2014/main" id="{15F75423-1A49-4A97-992C-ED18FF44500B}"/>
+                <a16:creationId xmlns:a16="http://schemas.microsoft.com/office/drawing/2014/main" id="{E727CEC1-A70C-4584-9910-C0EC21706EBF}"/>
               </a:ext>
             </a:extLst>
           </p:cNvPr>
@@ -14829,7 +14859,7 @@
           <p:cNvPr id="7" name="whole-block">
             <a:extLst xmlns:a="http://schemas.openxmlformats.org/drawingml/2006/main">
               <a:ext uri="{FF2B5EF4-FFF2-40B4-BE49-F238E27FC236}">
-                <a16:creationId xmlns:a16="http://schemas.microsoft.com/office/drawing/2014/main" id="{F9626830-300B-4062-8C92-9EAE97CD7055}"/>
+                <a16:creationId xmlns:a16="http://schemas.microsoft.com/office/drawing/2014/main" id="{5BFE7905-7489-46B5-985A-3E3DBABF3F25}"/>
               </a:ext>
             </a:extLst>
           </p:cNvPr>
@@ -14915,7 +14945,7 @@
           <p:cNvPr id="8" name="eyebrow">
             <a:extLst xmlns:a="http://schemas.openxmlformats.org/drawingml/2006/main">
               <a:ext uri="{FF2B5EF4-FFF2-40B4-BE49-F238E27FC236}">
-                <a16:creationId xmlns:a16="http://schemas.microsoft.com/office/drawing/2014/main" id="{7D32E32C-E83B-46B3-8CC6-BAEAA5E889C5}"/>
+                <a16:creationId xmlns:a16="http://schemas.microsoft.com/office/drawing/2014/main" id="{F5103186-F296-4C98-BCB7-9127FA2D529D}"/>
               </a:ext>
             </a:extLst>
           </p:cNvPr>
@@ -14972,7 +15002,7 @@
           <p:cNvPr id="2" name="slide-title">
             <a:extLst xmlns:a="http://schemas.openxmlformats.org/drawingml/2006/main">
               <a:ext uri="{FF2B5EF4-FFF2-40B4-BE49-F238E27FC236}">
-                <a16:creationId xmlns:a16="http://schemas.microsoft.com/office/drawing/2014/main" id="{175D0DCC-A39F-4CA0-8797-D2173E2E0AAD}"/>
+                <a16:creationId xmlns:a16="http://schemas.microsoft.com/office/drawing/2014/main" id="{A2068DE1-858C-4ABB-A009-1418F5A9C73C}"/>
               </a:ext>
             </a:extLst>
           </p:cNvPr>
@@ -15029,7 +15059,7 @@
           <p:cNvPr id="3" name="">
             <a:extLst xmlns:a="http://schemas.openxmlformats.org/drawingml/2006/main">
               <a:ext uri="{FF2B5EF4-FFF2-40B4-BE49-F238E27FC236}">
-                <a16:creationId xmlns:a16="http://schemas.microsoft.com/office/drawing/2014/main" id="{81719188-9284-456E-B5ED-520229EFD101}"/>
+                <a16:creationId xmlns:a16="http://schemas.microsoft.com/office/drawing/2014/main" id="{B4A7F4E2-3370-45B1-8731-EA51030D03AE}"/>
               </a:ext>
             </a:extLst>
           </p:cNvPr>
@@ -15061,7 +15091,7 @@
           <p:cNvPr id="4" name="slide-number">
             <a:extLst xmlns:a="http://schemas.openxmlformats.org/drawingml/2006/main">
               <a:ext uri="{FF2B5EF4-FFF2-40B4-BE49-F238E27FC236}">
-                <a16:creationId xmlns:a16="http://schemas.microsoft.com/office/drawing/2014/main" id="{3A0BAACA-076C-4A6B-BF06-0558DCE42B43}"/>
+                <a16:creationId xmlns:a16="http://schemas.microsoft.com/office/drawing/2014/main" id="{6394A3D0-32B0-4FD9-AB5C-93D4E284D6D9}"/>
               </a:ext>
             </a:extLst>
           </p:cNvPr>
@@ -15437,7 +15467,7 @@
           <p:cNvPr id="6" name="">
             <a:extLst xmlns:a="http://schemas.openxmlformats.org/drawingml/2006/main">
               <a:ext uri="{FF2B5EF4-FFF2-40B4-BE49-F238E27FC236}">
-                <a16:creationId xmlns:a16="http://schemas.microsoft.com/office/drawing/2014/main" id="{7E73D4B4-AC91-46FE-A58C-F304129B11EF}"/>
+                <a16:creationId xmlns:a16="http://schemas.microsoft.com/office/drawing/2014/main" id="{ABBFCE14-E8D2-4AD1-8D6A-45F132AEA114}"/>
               </a:ext>
             </a:extLst>
           </p:cNvPr>
@@ -15469,7 +15499,7 @@
           <p:cNvPr id="7" name="postcheck">
             <a:extLst xmlns:a="http://schemas.openxmlformats.org/drawingml/2006/main">
               <a:ext uri="{FF2B5EF4-FFF2-40B4-BE49-F238E27FC236}">
-                <a16:creationId xmlns:a16="http://schemas.microsoft.com/office/drawing/2014/main" id="{50FDC349-01DC-4A33-ACEB-053228E2BC02}"/>
+                <a16:creationId xmlns:a16="http://schemas.microsoft.com/office/drawing/2014/main" id="{3D13179B-055F-436C-A5C0-9C1DA6F52407}"/>
               </a:ext>
             </a:extLst>
           </p:cNvPr>
@@ -15601,7 +15631,7 @@
           <p:cNvPr id="11" name="eyebrow">
             <a:extLst xmlns:a="http://schemas.openxmlformats.org/drawingml/2006/main">
               <a:ext uri="{FF2B5EF4-FFF2-40B4-BE49-F238E27FC236}">
-                <a16:creationId xmlns:a16="http://schemas.microsoft.com/office/drawing/2014/main" id="{CBFB236B-96A7-45F7-82A3-A70D2233C560}"/>
+                <a16:creationId xmlns:a16="http://schemas.microsoft.com/office/drawing/2014/main" id="{5FB0CB77-A11B-4C3F-93F5-E79B25F68EB8}"/>
               </a:ext>
             </a:extLst>
           </p:cNvPr>
@@ -15658,7 +15688,7 @@
           <p:cNvPr id="2" name="slide-title">
             <a:extLst xmlns:a="http://schemas.openxmlformats.org/drawingml/2006/main">
               <a:ext uri="{FF2B5EF4-FFF2-40B4-BE49-F238E27FC236}">
-                <a16:creationId xmlns:a16="http://schemas.microsoft.com/office/drawing/2014/main" id="{922664C8-011D-4B0D-9359-B302CD7E318C}"/>
+                <a16:creationId xmlns:a16="http://schemas.microsoft.com/office/drawing/2014/main" id="{A416EB9A-855B-48A0-831B-7FE43682C286}"/>
               </a:ext>
             </a:extLst>
           </p:cNvPr>
@@ -15715,7 +15745,7 @@
           <p:cNvPr id="3" name="">
             <a:extLst xmlns:a="http://schemas.openxmlformats.org/drawingml/2006/main">
               <a:ext uri="{FF2B5EF4-FFF2-40B4-BE49-F238E27FC236}">
-                <a16:creationId xmlns:a16="http://schemas.microsoft.com/office/drawing/2014/main" id="{F122E7E0-4E1C-4D65-BF30-E08C6AD5ED64}"/>
+                <a16:creationId xmlns:a16="http://schemas.microsoft.com/office/drawing/2014/main" id="{B9BEC49D-E5E2-4662-8037-DBDA54308C7F}"/>
               </a:ext>
             </a:extLst>
           </p:cNvPr>
@@ -15747,7 +15777,7 @@
           <p:cNvPr id="4" name="slide-number">
             <a:extLst xmlns:a="http://schemas.openxmlformats.org/drawingml/2006/main">
               <a:ext uri="{FF2B5EF4-FFF2-40B4-BE49-F238E27FC236}">
-                <a16:creationId xmlns:a16="http://schemas.microsoft.com/office/drawing/2014/main" id="{065A5CED-297C-4760-AAD6-0007537D2887}"/>
+                <a16:creationId xmlns:a16="http://schemas.microsoft.com/office/drawing/2014/main" id="{58935236-4B61-4553-8BE6-4689558F79B2}"/>
               </a:ext>
             </a:extLst>
           </p:cNvPr>
@@ -15804,7 +15834,7 @@
           <p:cNvPr id="5" name="">
             <a:extLst xmlns:a="http://schemas.openxmlformats.org/drawingml/2006/main">
               <a:ext uri="{FF2B5EF4-FFF2-40B4-BE49-F238E27FC236}">
-                <a16:creationId xmlns:a16="http://schemas.microsoft.com/office/drawing/2014/main" id="{6A410ED4-5C74-4065-9DD3-771169A048EF}"/>
+                <a16:creationId xmlns:a16="http://schemas.microsoft.com/office/drawing/2014/main" id="{F343CB03-C42A-4B12-A7FE-FB3D13506DF6}"/>
               </a:ext>
             </a:extLst>
           </p:cNvPr>
@@ -15836,7 +15866,7 @@
           <p:cNvPr id="6" name="failure-sql">
             <a:extLst xmlns:a="http://schemas.openxmlformats.org/drawingml/2006/main">
               <a:ext uri="{FF2B5EF4-FFF2-40B4-BE49-F238E27FC236}">
-                <a16:creationId xmlns:a16="http://schemas.microsoft.com/office/drawing/2014/main" id="{1E60698E-79F3-44E5-BCEB-4581E78BF3BC}"/>
+                <a16:creationId xmlns:a16="http://schemas.microsoft.com/office/drawing/2014/main" id="{16BA1DEC-3455-42E5-9417-F616FC04B5BA}"/>
               </a:ext>
             </a:extLst>
           </p:cNvPr>
@@ -15985,7 +16015,7 @@
           <p:cNvPr id="7" name="failure-result">
             <a:extLst xmlns:a="http://schemas.openxmlformats.org/drawingml/2006/main">
               <a:ext uri="{FF2B5EF4-FFF2-40B4-BE49-F238E27FC236}">
-                <a16:creationId xmlns:a16="http://schemas.microsoft.com/office/drawing/2014/main" id="{F6A147F5-31D8-46FE-B20C-7E689CF81674}"/>
+                <a16:creationId xmlns:a16="http://schemas.microsoft.com/office/drawing/2014/main" id="{2177C360-5F79-49E1-90B8-EBF65EEAA136}"/>
               </a:ext>
             </a:extLst>
           </p:cNvPr>
@@ -16065,7 +16095,7 @@
           <p:cNvPr id="8" name="">
             <a:extLst xmlns:a="http://schemas.openxmlformats.org/drawingml/2006/main">
               <a:ext uri="{FF2B5EF4-FFF2-40B4-BE49-F238E27FC236}">
-                <a16:creationId xmlns:a16="http://schemas.microsoft.com/office/drawing/2014/main" id="{396FDB9D-9522-47AC-BA53-CAB6A2C3BC45}"/>
+                <a16:creationId xmlns:a16="http://schemas.microsoft.com/office/drawing/2014/main" id="{560996C1-CC85-4970-8A2D-6C7C6D17B347}"/>
               </a:ext>
             </a:extLst>
           </p:cNvPr>
@@ -16097,7 +16127,7 @@
           <p:cNvPr id="9" name="failure-cleanup">
             <a:extLst xmlns:a="http://schemas.openxmlformats.org/drawingml/2006/main">
               <a:ext uri="{FF2B5EF4-FFF2-40B4-BE49-F238E27FC236}">
-                <a16:creationId xmlns:a16="http://schemas.microsoft.com/office/drawing/2014/main" id="{A1DB393A-1DB3-40EF-AA66-424AB7E309F6}"/>
+                <a16:creationId xmlns:a16="http://schemas.microsoft.com/office/drawing/2014/main" id="{2F20C1D2-81A5-4432-B9FF-32E9CA9E0EEE}"/>
               </a:ext>
             </a:extLst>
           </p:cNvPr>
@@ -16177,7 +16207,7 @@
           <p:cNvPr id="10" name="failure-run">
             <a:extLst xmlns:a="http://schemas.openxmlformats.org/drawingml/2006/main">
               <a:ext uri="{FF2B5EF4-FFF2-40B4-BE49-F238E27FC236}">
-                <a16:creationId xmlns:a16="http://schemas.microsoft.com/office/drawing/2014/main" id="{48BBA910-914C-4246-B869-F4F1566C0B3B}"/>
+                <a16:creationId xmlns:a16="http://schemas.microsoft.com/office/drawing/2014/main" id="{2AB73AAD-28AC-4306-9072-EA6FA26F794C}"/>
               </a:ext>
             </a:extLst>
           </p:cNvPr>
@@ -16263,7 +16293,7 @@
           <p:cNvPr id="9" name="eyebrow">
             <a:extLst xmlns:a="http://schemas.openxmlformats.org/drawingml/2006/main">
               <a:ext uri="{FF2B5EF4-FFF2-40B4-BE49-F238E27FC236}">
-                <a16:creationId xmlns:a16="http://schemas.microsoft.com/office/drawing/2014/main" id="{5A214816-298C-4BB8-9545-2982F75B79BB}"/>
+                <a16:creationId xmlns:a16="http://schemas.microsoft.com/office/drawing/2014/main" id="{FD15A125-832E-4E9B-97AC-7BAA6EF11FC8}"/>
               </a:ext>
             </a:extLst>
           </p:cNvPr>
@@ -16320,7 +16350,7 @@
           <p:cNvPr id="2" name="slide-title">
             <a:extLst xmlns:a="http://schemas.openxmlformats.org/drawingml/2006/main">
               <a:ext uri="{FF2B5EF4-FFF2-40B4-BE49-F238E27FC236}">
-                <a16:creationId xmlns:a16="http://schemas.microsoft.com/office/drawing/2014/main" id="{B2D1E599-BBDA-4A05-9FD6-8BA1FC2F52B6}"/>
+                <a16:creationId xmlns:a16="http://schemas.microsoft.com/office/drawing/2014/main" id="{E35C31FA-D981-4F02-ADED-5FA54229E0B9}"/>
               </a:ext>
             </a:extLst>
           </p:cNvPr>
@@ -16377,7 +16407,7 @@
           <p:cNvPr id="3" name="">
             <a:extLst xmlns:a="http://schemas.openxmlformats.org/drawingml/2006/main">
               <a:ext uri="{FF2B5EF4-FFF2-40B4-BE49-F238E27FC236}">
-                <a16:creationId xmlns:a16="http://schemas.microsoft.com/office/drawing/2014/main" id="{AF8F9BD0-282F-41FC-9B93-57A88FAB0ED8}"/>
+                <a16:creationId xmlns:a16="http://schemas.microsoft.com/office/drawing/2014/main" id="{86935EFE-8338-490F-9BB1-5B17257219D9}"/>
               </a:ext>
             </a:extLst>
           </p:cNvPr>
@@ -16409,7 +16439,7 @@
           <p:cNvPr id="4" name="slide-number">
             <a:extLst xmlns:a="http://schemas.openxmlformats.org/drawingml/2006/main">
               <a:ext uri="{FF2B5EF4-FFF2-40B4-BE49-F238E27FC236}">
-                <a16:creationId xmlns:a16="http://schemas.microsoft.com/office/drawing/2014/main" id="{6ED63E90-675B-4F60-8741-65144660EB50}"/>
+                <a16:creationId xmlns:a16="http://schemas.microsoft.com/office/drawing/2014/main" id="{2B00323B-4012-4200-B18C-0BF71ADDC5D7}"/>
               </a:ext>
             </a:extLst>
           </p:cNvPr>
@@ -16466,7 +16496,7 @@
           <p:cNvPr id="5" name="">
             <a:extLst xmlns:a="http://schemas.openxmlformats.org/drawingml/2006/main">
               <a:ext uri="{FF2B5EF4-FFF2-40B4-BE49-F238E27FC236}">
-                <a16:creationId xmlns:a16="http://schemas.microsoft.com/office/drawing/2014/main" id="{E63DD4B5-3262-4E12-B728-50F2CD6DD60F}"/>
+                <a16:creationId xmlns:a16="http://schemas.microsoft.com/office/drawing/2014/main" id="{0A9F8DE3-5E58-47F8-9F57-C78786155363}"/>
               </a:ext>
             </a:extLst>
           </p:cNvPr>
@@ -16498,7 +16528,7 @@
           <p:cNvPr id="6" name="zero-sql">
             <a:extLst xmlns:a="http://schemas.openxmlformats.org/drawingml/2006/main">
               <a:ext uri="{FF2B5EF4-FFF2-40B4-BE49-F238E27FC236}">
-                <a16:creationId xmlns:a16="http://schemas.microsoft.com/office/drawing/2014/main" id="{494D9DAA-C0BA-4CA8-A7FA-F8B691DB5042}"/>
+                <a16:creationId xmlns:a16="http://schemas.microsoft.com/office/drawing/2014/main" id="{DF4FD002-9971-45CE-B91B-54019E39FC33}"/>
               </a:ext>
             </a:extLst>
           </p:cNvPr>
@@ -16647,7 +16677,7 @@
           <p:cNvPr id="7" name="zero-outcome">
             <a:extLst xmlns:a="http://schemas.openxmlformats.org/drawingml/2006/main">
               <a:ext uri="{FF2B5EF4-FFF2-40B4-BE49-F238E27FC236}">
-                <a16:creationId xmlns:a16="http://schemas.microsoft.com/office/drawing/2014/main" id="{C4BABAFC-FACC-48D1-A8F4-52DECB7D93D1}"/>
+                <a16:creationId xmlns:a16="http://schemas.microsoft.com/office/drawing/2014/main" id="{54139A78-306E-46DF-BA00-E88ED9B4DF18}"/>
               </a:ext>
             </a:extLst>
           </p:cNvPr>
@@ -16704,7 +16734,7 @@
           <p:cNvPr id="8" name="zero-action">
             <a:extLst xmlns:a="http://schemas.openxmlformats.org/drawingml/2006/main">
               <a:ext uri="{FF2B5EF4-FFF2-40B4-BE49-F238E27FC236}">
-                <a16:creationId xmlns:a16="http://schemas.microsoft.com/office/drawing/2014/main" id="{A780A9FA-60B1-48F1-86B4-8C484ABF28CC}"/>
+                <a16:creationId xmlns:a16="http://schemas.microsoft.com/office/drawing/2014/main" id="{BA877CBD-532A-42CF-8478-ECE6601E1BD2}"/>
               </a:ext>
             </a:extLst>
           </p:cNvPr>
@@ -16790,7 +16820,7 @@
           <p:cNvPr id="7" name="eyebrow">
             <a:extLst xmlns:a="http://schemas.openxmlformats.org/drawingml/2006/main">
               <a:ext uri="{FF2B5EF4-FFF2-40B4-BE49-F238E27FC236}">
-                <a16:creationId xmlns:a16="http://schemas.microsoft.com/office/drawing/2014/main" id="{F0DDAA0D-7EE4-4991-87C6-36EEA7D36CC3}"/>
+                <a16:creationId xmlns:a16="http://schemas.microsoft.com/office/drawing/2014/main" id="{99A11F11-3218-4766-A4CE-CA316E2EA45F}"/>
               </a:ext>
             </a:extLst>
           </p:cNvPr>
@@ -16847,7 +16877,7 @@
           <p:cNvPr id="2" name="slide-title">
             <a:extLst xmlns:a="http://schemas.openxmlformats.org/drawingml/2006/main">
               <a:ext uri="{FF2B5EF4-FFF2-40B4-BE49-F238E27FC236}">
-                <a16:creationId xmlns:a16="http://schemas.microsoft.com/office/drawing/2014/main" id="{4465BE77-8B81-49B3-A0B2-FC7A1290F5A0}"/>
+                <a16:creationId xmlns:a16="http://schemas.microsoft.com/office/drawing/2014/main" id="{C3140584-4701-4462-921B-1B780D0DF556}"/>
               </a:ext>
             </a:extLst>
           </p:cNvPr>
@@ -16904,7 +16934,7 @@
           <p:cNvPr id="3" name="">
             <a:extLst xmlns:a="http://schemas.openxmlformats.org/drawingml/2006/main">
               <a:ext uri="{FF2B5EF4-FFF2-40B4-BE49-F238E27FC236}">
-                <a16:creationId xmlns:a16="http://schemas.microsoft.com/office/drawing/2014/main" id="{D575BE53-E793-448D-8030-82DCE5DEE42D}"/>
+                <a16:creationId xmlns:a16="http://schemas.microsoft.com/office/drawing/2014/main" id="{C07F8ADB-C7F8-4A97-882A-9E3FEC470B17}"/>
               </a:ext>
             </a:extLst>
           </p:cNvPr>
@@ -16936,7 +16966,7 @@
           <p:cNvPr id="4" name="slide-number">
             <a:extLst xmlns:a="http://schemas.openxmlformats.org/drawingml/2006/main">
               <a:ext uri="{FF2B5EF4-FFF2-40B4-BE49-F238E27FC236}">
-                <a16:creationId xmlns:a16="http://schemas.microsoft.com/office/drawing/2014/main" id="{D2F556DD-C813-4AB0-BEC4-A271D6A1BA4C}"/>
+                <a16:creationId xmlns:a16="http://schemas.microsoft.com/office/drawing/2014/main" id="{52743D68-0E56-423E-B08C-EE625269B78A}"/>
               </a:ext>
             </a:extLst>
           </p:cNvPr>
@@ -17265,7 +17295,7 @@
           <p:cNvPr id="6" name="acid-limits">
             <a:extLst xmlns:a="http://schemas.openxmlformats.org/drawingml/2006/main">
               <a:ext uri="{FF2B5EF4-FFF2-40B4-BE49-F238E27FC236}">
-                <a16:creationId xmlns:a16="http://schemas.microsoft.com/office/drawing/2014/main" id="{8C51B6C2-851E-4D89-85F2-92BDBB8B557A}"/>
+                <a16:creationId xmlns:a16="http://schemas.microsoft.com/office/drawing/2014/main" id="{D4C30E08-3AB9-4DD8-9377-8629134CE8AE}"/>
               </a:ext>
             </a:extLst>
           </p:cNvPr>
@@ -17351,7 +17381,7 @@
           <p:cNvPr id="9" name="eyebrow">
             <a:extLst xmlns:a="http://schemas.openxmlformats.org/drawingml/2006/main">
               <a:ext uri="{FF2B5EF4-FFF2-40B4-BE49-F238E27FC236}">
-                <a16:creationId xmlns:a16="http://schemas.microsoft.com/office/drawing/2014/main" id="{8CE99A23-AFEE-437D-A606-B7137DAF1C22}"/>
+                <a16:creationId xmlns:a16="http://schemas.microsoft.com/office/drawing/2014/main" id="{38A5FB20-C46B-486D-A3FA-D4837C4D510F}"/>
               </a:ext>
             </a:extLst>
           </p:cNvPr>
@@ -17408,7 +17438,7 @@
           <p:cNvPr id="2" name="slide-title">
             <a:extLst xmlns:a="http://schemas.openxmlformats.org/drawingml/2006/main">
               <a:ext uri="{FF2B5EF4-FFF2-40B4-BE49-F238E27FC236}">
-                <a16:creationId xmlns:a16="http://schemas.microsoft.com/office/drawing/2014/main" id="{94703EF6-7561-4C01-95A9-8CEBA8623032}"/>
+                <a16:creationId xmlns:a16="http://schemas.microsoft.com/office/drawing/2014/main" id="{14E505A2-0B40-4C04-B027-4722E8FC18C2}"/>
               </a:ext>
             </a:extLst>
           </p:cNvPr>
@@ -17465,7 +17495,7 @@
           <p:cNvPr id="3" name="">
             <a:extLst xmlns:a="http://schemas.openxmlformats.org/drawingml/2006/main">
               <a:ext uri="{FF2B5EF4-FFF2-40B4-BE49-F238E27FC236}">
-                <a16:creationId xmlns:a16="http://schemas.microsoft.com/office/drawing/2014/main" id="{0027AFDA-2B9A-4AE1-896C-4DA106BC60AB}"/>
+                <a16:creationId xmlns:a16="http://schemas.microsoft.com/office/drawing/2014/main" id="{9A5253C8-538B-4E37-89F7-573DB4105B54}"/>
               </a:ext>
             </a:extLst>
           </p:cNvPr>
@@ -17497,7 +17527,7 @@
           <p:cNvPr id="4" name="slide-number">
             <a:extLst xmlns:a="http://schemas.openxmlformats.org/drawingml/2006/main">
               <a:ext uri="{FF2B5EF4-FFF2-40B4-BE49-F238E27FC236}">
-                <a16:creationId xmlns:a16="http://schemas.microsoft.com/office/drawing/2014/main" id="{5CE4F766-A956-45B8-8072-3BEE89ED0CF7}"/>
+                <a16:creationId xmlns:a16="http://schemas.microsoft.com/office/drawing/2014/main" id="{21E8F151-B18E-4E39-8DC0-4305B574C61D}"/>
               </a:ext>
             </a:extLst>
           </p:cNvPr>
@@ -17554,7 +17584,7 @@
           <p:cNvPr id="5" name="lab1">
             <a:extLst xmlns:a="http://schemas.openxmlformats.org/drawingml/2006/main">
               <a:ext uri="{FF2B5EF4-FFF2-40B4-BE49-F238E27FC236}">
-                <a16:creationId xmlns:a16="http://schemas.microsoft.com/office/drawing/2014/main" id="{EE9D7B11-2221-4F3B-B8F6-BFF5FB5443E3}"/>
+                <a16:creationId xmlns:a16="http://schemas.microsoft.com/office/drawing/2014/main" id="{DCC5646F-FDCE-444A-8F59-9601D80FC493}"/>
               </a:ext>
             </a:extLst>
           </p:cNvPr>
@@ -17611,7 +17641,7 @@
           <p:cNvPr id="6" name="lab1-actions">
             <a:extLst xmlns:a="http://schemas.openxmlformats.org/drawingml/2006/main">
               <a:ext uri="{FF2B5EF4-FFF2-40B4-BE49-F238E27FC236}">
-                <a16:creationId xmlns:a16="http://schemas.microsoft.com/office/drawing/2014/main" id="{6413F6AB-1EDB-420D-BD34-7EADB298A12E}"/>
+                <a16:creationId xmlns:a16="http://schemas.microsoft.com/office/drawing/2014/main" id="{6B34128E-D0B2-49EC-BC11-2CCE06610FC8}"/>
               </a:ext>
             </a:extLst>
           </p:cNvPr>
@@ -17640,48 +17670,48 @@
           <a:lstStyle xmlns:a="http://schemas.openxmlformats.org/drawingml/2006/main"/>
           <a:p xmlns:a="http://schemas.openxmlformats.org/drawingml/2006/main">
             <a:pPr>
-              <a:defRPr sz="2475" b="0">
-                <a:solidFill>
-                  <a:srgbClr val="111827"/>
-                </a:solidFill>
-                <a:latin typeface="Helvetica Neue"/>
-                <a:ea typeface="Helvetica Neue"/>
-                <a:cs typeface="Helvetica Neue"/>
-              </a:defRPr>
-            </a:pPr>
-            <a:r>
-              <a:rPr sz="2475" b="0">
-                <a:solidFill>
-                  <a:srgbClr val="111827"/>
-                </a:solidFill>
-                <a:latin typeface="Helvetica Neue"/>
-                <a:ea typeface="Helvetica Neue"/>
-                <a:cs typeface="Helvetica Neue"/>
-              </a:rPr>
-              <a:t>Rehearse the assignment to Priya, then commit it.</a:t>
-            </a:r>
-          </a:p>
-          <a:p xmlns:a="http://schemas.openxmlformats.org/drawingml/2006/main">
-            <a:pPr>
-              <a:defRPr sz="2475" b="0">
-                <a:solidFill>
-                  <a:srgbClr val="111827"/>
-                </a:solidFill>
-                <a:latin typeface="Helvetica Neue"/>
-                <a:ea typeface="Helvetica Neue"/>
-                <a:cs typeface="Helvetica Neue"/>
-              </a:defRPr>
-            </a:pPr>
-            <a:r>
-              <a:rPr sz="2475" b="0">
-                <a:solidFill>
-                  <a:srgbClr val="111827"/>
-                </a:solidFill>
-                <a:latin typeface="Helvetica Neue"/>
-                <a:ea typeface="Helvetica Neue"/>
-                <a:cs typeface="Helvetica Neue"/>
-              </a:rPr>
-              <a:t>Test a failed pair and check what survives rollback.</a:t>
+              <a:defRPr sz="2400" b="0">
+                <a:solidFill>
+                  <a:srgbClr val="111827"/>
+                </a:solidFill>
+                <a:latin typeface="Helvetica Neue"/>
+                <a:ea typeface="Helvetica Neue"/>
+                <a:cs typeface="Helvetica Neue"/>
+              </a:defRPr>
+            </a:pPr>
+            <a:r>
+              <a:rPr sz="2400" b="0">
+                <a:solidFill>
+                  <a:srgbClr val="111827"/>
+                </a:solidFill>
+                <a:latin typeface="Helvetica Neue"/>
+                <a:ea typeface="Helvetica Neue"/>
+                <a:cs typeface="Helvetica Neue"/>
+              </a:rPr>
+              <a:t>Rehearse and commit Priya's assignment.</a:t>
+            </a:r>
+          </a:p>
+          <a:p xmlns:a="http://schemas.openxmlformats.org/drawingml/2006/main">
+            <a:pPr>
+              <a:defRPr sz="2400" b="0">
+                <a:solidFill>
+                  <a:srgbClr val="111827"/>
+                </a:solidFill>
+                <a:latin typeface="Helvetica Neue"/>
+                <a:ea typeface="Helvetica Neue"/>
+                <a:cs typeface="Helvetica Neue"/>
+              </a:defRPr>
+            </a:pPr>
+            <a:r>
+              <a:rPr sz="2400" b="0">
+                <a:solidFill>
+                  <a:srgbClr val="111827"/>
+                </a:solidFill>
+                <a:latin typeface="Helvetica Neue"/>
+                <a:ea typeface="Helvetica Neue"/>
+                <a:cs typeface="Helvetica Neue"/>
+              </a:rPr>
+              <a:t>Compare a failed pair with an outdated assignment request.</a:t>
             </a:r>
           </a:p>
         </p:txBody>
@@ -17691,7 +17721,7 @@
           <p:cNvPr id="7" name="lab1-write">
             <a:extLst xmlns:a="http://schemas.openxmlformats.org/drawingml/2006/main">
               <a:ext uri="{FF2B5EF4-FFF2-40B4-BE49-F238E27FC236}">
-                <a16:creationId xmlns:a16="http://schemas.microsoft.com/office/drawing/2014/main" id="{AEA51448-638E-4034-B07A-B671AD9D078C}"/>
+                <a16:creationId xmlns:a16="http://schemas.microsoft.com/office/drawing/2014/main" id="{03D57A15-3D8C-4170-94F9-0D7092531BDA}"/>
               </a:ext>
             </a:extLst>
           </p:cNvPr>
@@ -17738,7 +17768,7 @@
                 <a:ea typeface="Helvetica Neue"/>
                 <a:cs typeface="Helvetica Neue"/>
               </a:rPr>
-              <a:t>Explain why separate commits could leave an assignment without its matching history.</a:t>
+              <a:t>Read the returned rows before announcing success. Explain why assignment and history must commit together.</a:t>
             </a:r>
           </a:p>
         </p:txBody>
@@ -17748,7 +17778,7 @@
           <p:cNvPr id="8" name="lab1-submit">
             <a:extLst xmlns:a="http://schemas.openxmlformats.org/drawingml/2006/main">
               <a:ext uri="{FF2B5EF4-FFF2-40B4-BE49-F238E27FC236}">
-                <a16:creationId xmlns:a16="http://schemas.microsoft.com/office/drawing/2014/main" id="{35FDFBD1-1D59-44C0-837D-C65C23CAC2A5}"/>
+                <a16:creationId xmlns:a16="http://schemas.microsoft.com/office/drawing/2014/main" id="{5C6DFDEA-880E-4E21-9929-EFD07425A420}"/>
               </a:ext>
             </a:extLst>
           </p:cNvPr>
